--- a/bowtie_design_notes.pptx
+++ b/bowtie_design_notes.pptx
@@ -7,6 +7,12 @@
   <p:sldIdLst>
     <p:sldId id="256" r:id="rId2"/>
     <p:sldId id="257" r:id="rId3"/>
+    <p:sldId id="258" r:id="rId4"/>
+    <p:sldId id="259" r:id="rId5"/>
+    <p:sldId id="260" r:id="rId6"/>
+    <p:sldId id="261" r:id="rId7"/>
+    <p:sldId id="262" r:id="rId8"/>
+    <p:sldId id="263" r:id="rId9"/>
   </p:sldIdLst>
   <p:sldSz cx="12192000" cy="6858000"/>
   <p:notesSz cx="6858000" cy="9144000"/>
@@ -105,13 +111,18 @@
       </a:defRPr>
     </a:lvl9pPr>
   </p:defaultTextStyle>
+  <p:extLst>
+    <p:ext uri="{EFAFB233-063F-42B5-8137-9DF3F51BA10A}">
+      <p15:sldGuideLst xmlns:p15="http://schemas.microsoft.com/office/powerpoint/2012/main"/>
+    </p:ext>
+  </p:extLst>
 </p:presentation>
 </file>
 
 <file path=ppt/revisionInfo.xml><?xml version="1.0" encoding="utf-8"?>
 <p1510:revInfo xmlns:a="http://schemas.openxmlformats.org/drawingml/2006/main" xmlns:r="http://schemas.openxmlformats.org/officeDocument/2006/relationships" xmlns:p1510="http://schemas.microsoft.com/office/powerpoint/2015/10/main">
   <p1510:revLst>
-    <p1510:client id="{3BCA02BA-0FB2-DA4B-8BBC-CE8B401E8468}" v="5" dt="2026-07-21T08:42:23.198"/>
+    <p1510:client id="{3BCA02BA-0FB2-DA4B-8BBC-CE8B401E8468}" v="15" dt="2026-07-21T21:23:00.041"/>
   </p1510:revLst>
 </p1510:revInfo>
 </file>
@@ -121,7 +132,7 @@
   <pc:docChgLst>
     <pc:chgData name="Lars Pettersson" userId="bbe8ee3e1743ce4e" providerId="LiveId" clId="{76C9B083-C5CE-54A4-81E8-16672380D724}"/>
     <pc:docChg chg="undo custSel addSld modSld">
-      <pc:chgData name="Lars Pettersson" userId="bbe8ee3e1743ce4e" providerId="LiveId" clId="{76C9B083-C5CE-54A4-81E8-16672380D724}" dt="2026-07-21T08:42:43.766" v="108" actId="1076"/>
+      <pc:chgData name="Lars Pettersson" userId="bbe8ee3e1743ce4e" providerId="LiveId" clId="{76C9B083-C5CE-54A4-81E8-16672380D724}" dt="2026-07-21T21:24:18.875" v="545" actId="20577"/>
       <pc:docMkLst>
         <pc:docMk/>
       </pc:docMkLst>
@@ -210,6 +221,200 @@
             <ac:picMk id="4" creationId="{246BFC48-AB3C-00F5-2887-91658A85E46D}"/>
           </ac:picMkLst>
         </pc:picChg>
+      </pc:sldChg>
+      <pc:sldChg chg="addSp delSp modSp new mod">
+        <pc:chgData name="Lars Pettersson" userId="bbe8ee3e1743ce4e" providerId="LiveId" clId="{76C9B083-C5CE-54A4-81E8-16672380D724}" dt="2026-07-21T19:30:03.427" v="222" actId="20577"/>
+        <pc:sldMkLst>
+          <pc:docMk/>
+          <pc:sldMk cId="3747206509" sldId="258"/>
+        </pc:sldMkLst>
+        <pc:spChg chg="mod">
+          <ac:chgData name="Lars Pettersson" userId="bbe8ee3e1743ce4e" providerId="LiveId" clId="{76C9B083-C5CE-54A4-81E8-16672380D724}" dt="2026-07-21T19:30:03.427" v="222" actId="20577"/>
+          <ac:spMkLst>
+            <pc:docMk/>
+            <pc:sldMk cId="3747206509" sldId="258"/>
+            <ac:spMk id="2" creationId="{F3565B0E-85EC-C1F0-9D40-0C6F287C30EB}"/>
+          </ac:spMkLst>
+        </pc:spChg>
+        <pc:spChg chg="del">
+          <ac:chgData name="Lars Pettersson" userId="bbe8ee3e1743ce4e" providerId="LiveId" clId="{76C9B083-C5CE-54A4-81E8-16672380D724}" dt="2026-07-21T19:21:53.582" v="121" actId="478"/>
+          <ac:spMkLst>
+            <pc:docMk/>
+            <pc:sldMk cId="3747206509" sldId="258"/>
+            <ac:spMk id="3" creationId="{63BF095E-2ECE-6E95-0543-AB1FCB1518B2}"/>
+          </ac:spMkLst>
+        </pc:spChg>
+        <pc:picChg chg="add mod">
+          <ac:chgData name="Lars Pettersson" userId="bbe8ee3e1743ce4e" providerId="LiveId" clId="{76C9B083-C5CE-54A4-81E8-16672380D724}" dt="2026-07-21T19:22:23.562" v="200" actId="1076"/>
+          <ac:picMkLst>
+            <pc:docMk/>
+            <pc:sldMk cId="3747206509" sldId="258"/>
+            <ac:picMk id="4" creationId="{50054214-4128-FA97-4963-AE24CC8545D9}"/>
+          </ac:picMkLst>
+        </pc:picChg>
+      </pc:sldChg>
+      <pc:sldChg chg="addSp delSp modSp new mod">
+        <pc:chgData name="Lars Pettersson" userId="bbe8ee3e1743ce4e" providerId="LiveId" clId="{76C9B083-C5CE-54A4-81E8-16672380D724}" dt="2026-07-21T19:30:15.385" v="237" actId="20577"/>
+        <pc:sldMkLst>
+          <pc:docMk/>
+          <pc:sldMk cId="3679306684" sldId="259"/>
+        </pc:sldMkLst>
+        <pc:spChg chg="mod">
+          <ac:chgData name="Lars Pettersson" userId="bbe8ee3e1743ce4e" providerId="LiveId" clId="{76C9B083-C5CE-54A4-81E8-16672380D724}" dt="2026-07-21T19:30:15.385" v="237" actId="20577"/>
+          <ac:spMkLst>
+            <pc:docMk/>
+            <pc:sldMk cId="3679306684" sldId="259"/>
+            <ac:spMk id="2" creationId="{F1CECDB1-7D3A-7A83-5B7D-A007AB72549C}"/>
+          </ac:spMkLst>
+        </pc:spChg>
+        <pc:spChg chg="del">
+          <ac:chgData name="Lars Pettersson" userId="bbe8ee3e1743ce4e" providerId="LiveId" clId="{76C9B083-C5CE-54A4-81E8-16672380D724}" dt="2026-07-21T19:29:39.822" v="202"/>
+          <ac:spMkLst>
+            <pc:docMk/>
+            <pc:sldMk cId="3679306684" sldId="259"/>
+            <ac:spMk id="3" creationId="{46F1EA74-9666-44F5-4C4C-CCB403A2C265}"/>
+          </ac:spMkLst>
+        </pc:spChg>
+        <pc:picChg chg="add mod">
+          <ac:chgData name="Lars Pettersson" userId="bbe8ee3e1743ce4e" providerId="LiveId" clId="{76C9B083-C5CE-54A4-81E8-16672380D724}" dt="2026-07-21T19:29:39.822" v="202"/>
+          <ac:picMkLst>
+            <pc:docMk/>
+            <pc:sldMk cId="3679306684" sldId="259"/>
+            <ac:picMk id="4" creationId="{5D2584DA-DC7E-8B34-683C-9704D8C5F166}"/>
+          </ac:picMkLst>
+        </pc:picChg>
+      </pc:sldChg>
+      <pc:sldChg chg="addSp delSp modSp new mod">
+        <pc:chgData name="Lars Pettersson" userId="bbe8ee3e1743ce4e" providerId="LiveId" clId="{76C9B083-C5CE-54A4-81E8-16672380D724}" dt="2026-07-21T19:30:58.098" v="261" actId="20577"/>
+        <pc:sldMkLst>
+          <pc:docMk/>
+          <pc:sldMk cId="1360940721" sldId="260"/>
+        </pc:sldMkLst>
+        <pc:spChg chg="mod">
+          <ac:chgData name="Lars Pettersson" userId="bbe8ee3e1743ce4e" providerId="LiveId" clId="{76C9B083-C5CE-54A4-81E8-16672380D724}" dt="2026-07-21T19:30:58.098" v="261" actId="20577"/>
+          <ac:spMkLst>
+            <pc:docMk/>
+            <pc:sldMk cId="1360940721" sldId="260"/>
+            <ac:spMk id="2" creationId="{38491A15-B9B9-97A3-92B4-CAE77F2E2C29}"/>
+          </ac:spMkLst>
+        </pc:spChg>
+        <pc:spChg chg="del">
+          <ac:chgData name="Lars Pettersson" userId="bbe8ee3e1743ce4e" providerId="LiveId" clId="{76C9B083-C5CE-54A4-81E8-16672380D724}" dt="2026-07-21T19:30:42.103" v="244"/>
+          <ac:spMkLst>
+            <pc:docMk/>
+            <pc:sldMk cId="1360940721" sldId="260"/>
+            <ac:spMk id="3" creationId="{4667A593-5957-FF1E-B6DF-6A8C08F38635}"/>
+          </ac:spMkLst>
+        </pc:spChg>
+        <pc:picChg chg="add">
+          <ac:chgData name="Lars Pettersson" userId="bbe8ee3e1743ce4e" providerId="LiveId" clId="{76C9B083-C5CE-54A4-81E8-16672380D724}" dt="2026-07-21T19:30:39.695" v="243"/>
+          <ac:picMkLst>
+            <pc:docMk/>
+            <pc:sldMk cId="1360940721" sldId="260"/>
+            <ac:picMk id="4" creationId="{581EE6AA-536A-7C5C-B0C5-E135B6F58E85}"/>
+          </ac:picMkLst>
+        </pc:picChg>
+        <pc:picChg chg="add mod">
+          <ac:chgData name="Lars Pettersson" userId="bbe8ee3e1743ce4e" providerId="LiveId" clId="{76C9B083-C5CE-54A4-81E8-16672380D724}" dt="2026-07-21T19:30:42.103" v="244"/>
+          <ac:picMkLst>
+            <pc:docMk/>
+            <pc:sldMk cId="1360940721" sldId="260"/>
+            <ac:picMk id="5" creationId="{BEABF87E-C70D-9F6A-7E5C-93B2F011562F}"/>
+          </ac:picMkLst>
+        </pc:picChg>
+      </pc:sldChg>
+      <pc:sldChg chg="addSp delSp modSp new mod">
+        <pc:chgData name="Lars Pettersson" userId="bbe8ee3e1743ce4e" providerId="LiveId" clId="{76C9B083-C5CE-54A4-81E8-16672380D724}" dt="2026-07-21T19:56:20.799" v="309" actId="1076"/>
+        <pc:sldMkLst>
+          <pc:docMk/>
+          <pc:sldMk cId="3762900069" sldId="261"/>
+        </pc:sldMkLst>
+        <pc:spChg chg="mod">
+          <ac:chgData name="Lars Pettersson" userId="bbe8ee3e1743ce4e" providerId="LiveId" clId="{76C9B083-C5CE-54A4-81E8-16672380D724}" dt="2026-07-21T19:47:32.945" v="301" actId="20577"/>
+          <ac:spMkLst>
+            <pc:docMk/>
+            <pc:sldMk cId="3762900069" sldId="261"/>
+            <ac:spMk id="2" creationId="{A10DAAD5-D6ED-BFCC-B880-C576B6937BC3}"/>
+          </ac:spMkLst>
+        </pc:spChg>
+        <pc:spChg chg="del">
+          <ac:chgData name="Lars Pettersson" userId="bbe8ee3e1743ce4e" providerId="LiveId" clId="{76C9B083-C5CE-54A4-81E8-16672380D724}" dt="2026-07-21T19:47:34.579" v="302"/>
+          <ac:spMkLst>
+            <pc:docMk/>
+            <pc:sldMk cId="3762900069" sldId="261"/>
+            <ac:spMk id="3" creationId="{1B873FFD-A2B5-3F7A-8C7E-4D091B179FD4}"/>
+          </ac:spMkLst>
+        </pc:spChg>
+        <pc:picChg chg="add mod">
+          <ac:chgData name="Lars Pettersson" userId="bbe8ee3e1743ce4e" providerId="LiveId" clId="{76C9B083-C5CE-54A4-81E8-16672380D724}" dt="2026-07-21T19:47:57.373" v="303" actId="1076"/>
+          <ac:picMkLst>
+            <pc:docMk/>
+            <pc:sldMk cId="3762900069" sldId="261"/>
+            <ac:picMk id="4" creationId="{8741317B-D7ED-B9E7-07C9-6A9F48B48040}"/>
+          </ac:picMkLst>
+        </pc:picChg>
+        <pc:picChg chg="add mod">
+          <ac:chgData name="Lars Pettersson" userId="bbe8ee3e1743ce4e" providerId="LiveId" clId="{76C9B083-C5CE-54A4-81E8-16672380D724}" dt="2026-07-21T19:48:01.622" v="305" actId="1076"/>
+          <ac:picMkLst>
+            <pc:docMk/>
+            <pc:sldMk cId="3762900069" sldId="261"/>
+            <ac:picMk id="5" creationId="{A1EA77B2-1690-C991-E211-5DD67C1A2D7A}"/>
+          </ac:picMkLst>
+        </pc:picChg>
+        <pc:picChg chg="add mod">
+          <ac:chgData name="Lars Pettersson" userId="bbe8ee3e1743ce4e" providerId="LiveId" clId="{76C9B083-C5CE-54A4-81E8-16672380D724}" dt="2026-07-21T19:56:20.799" v="309" actId="1076"/>
+          <ac:picMkLst>
+            <pc:docMk/>
+            <pc:sldMk cId="3762900069" sldId="261"/>
+            <ac:picMk id="6" creationId="{39ADA52D-F07E-7A11-8007-0385700D11ED}"/>
+          </ac:picMkLst>
+        </pc:picChg>
+      </pc:sldChg>
+      <pc:sldChg chg="modSp new mod">
+        <pc:chgData name="Lars Pettersson" userId="bbe8ee3e1743ce4e" providerId="LiveId" clId="{76C9B083-C5CE-54A4-81E8-16672380D724}" dt="2026-07-21T20:48:28.411" v="365" actId="27636"/>
+        <pc:sldMkLst>
+          <pc:docMk/>
+          <pc:sldMk cId="3811551630" sldId="262"/>
+        </pc:sldMkLst>
+        <pc:spChg chg="mod">
+          <ac:chgData name="Lars Pettersson" userId="bbe8ee3e1743ce4e" providerId="LiveId" clId="{76C9B083-C5CE-54A4-81E8-16672380D724}" dt="2026-07-21T20:48:26.844" v="363" actId="20577"/>
+          <ac:spMkLst>
+            <pc:docMk/>
+            <pc:sldMk cId="3811551630" sldId="262"/>
+            <ac:spMk id="2" creationId="{5C4C6A4B-A9A6-09E8-6BF4-2F3F16730C4D}"/>
+          </ac:spMkLst>
+        </pc:spChg>
+        <pc:spChg chg="mod">
+          <ac:chgData name="Lars Pettersson" userId="bbe8ee3e1743ce4e" providerId="LiveId" clId="{76C9B083-C5CE-54A4-81E8-16672380D724}" dt="2026-07-21T20:48:28.411" v="365" actId="27636"/>
+          <ac:spMkLst>
+            <pc:docMk/>
+            <pc:sldMk cId="3811551630" sldId="262"/>
+            <ac:spMk id="3" creationId="{8835C56B-BA69-4DE7-8A10-AC5FB8BA44D0}"/>
+          </ac:spMkLst>
+        </pc:spChg>
+      </pc:sldChg>
+      <pc:sldChg chg="modSp new mod">
+        <pc:chgData name="Lars Pettersson" userId="bbe8ee3e1743ce4e" providerId="LiveId" clId="{76C9B083-C5CE-54A4-81E8-16672380D724}" dt="2026-07-21T21:24:18.875" v="545" actId="20577"/>
+        <pc:sldMkLst>
+          <pc:docMk/>
+          <pc:sldMk cId="59111721" sldId="263"/>
+        </pc:sldMkLst>
+        <pc:spChg chg="mod">
+          <ac:chgData name="Lars Pettersson" userId="bbe8ee3e1743ce4e" providerId="LiveId" clId="{76C9B083-C5CE-54A4-81E8-16672380D724}" dt="2026-07-21T21:22:57.886" v="391" actId="20577"/>
+          <ac:spMkLst>
+            <pc:docMk/>
+            <pc:sldMk cId="59111721" sldId="263"/>
+            <ac:spMk id="2" creationId="{C6CFE8D1-969A-BDF5-E496-43644B08DA0B}"/>
+          </ac:spMkLst>
+        </pc:spChg>
+        <pc:spChg chg="mod">
+          <ac:chgData name="Lars Pettersson" userId="bbe8ee3e1743ce4e" providerId="LiveId" clId="{76C9B083-C5CE-54A4-81E8-16672380D724}" dt="2026-07-21T21:24:18.875" v="545" actId="20577"/>
+          <ac:spMkLst>
+            <pc:docMk/>
+            <pc:sldMk cId="59111721" sldId="263"/>
+            <ac:spMk id="3" creationId="{33E41D33-D379-6209-A358-C75E0902B1FD}"/>
+          </ac:spMkLst>
+        </pc:spChg>
       </pc:sldChg>
     </pc:docChg>
   </pc:docChgLst>
@@ -3748,6 +3953,848 @@
 </p:sld>
 </file>
 
+<file path=ppt/slides/slide3.xml><?xml version="1.0" encoding="utf-8"?>
+<p:sld xmlns:a="http://schemas.openxmlformats.org/drawingml/2006/main" xmlns:r="http://schemas.openxmlformats.org/officeDocument/2006/relationships" xmlns:p="http://schemas.openxmlformats.org/presentationml/2006/main">
+  <p:cSld>
+    <p:spTree>
+      <p:nvGrpSpPr>
+        <p:cNvPr id="1" name=""/>
+        <p:cNvGrpSpPr/>
+        <p:nvPr/>
+      </p:nvGrpSpPr>
+      <p:grpSpPr>
+        <a:xfrm>
+          <a:off x="0" y="0"/>
+          <a:ext cx="0" cy="0"/>
+          <a:chOff x="0" y="0"/>
+          <a:chExt cx="0" cy="0"/>
+        </a:xfrm>
+      </p:grpSpPr>
+      <p:sp>
+        <p:nvSpPr>
+          <p:cNvPr id="2" name="Title 1">
+            <a:extLst>
+              <a:ext uri="{FF2B5EF4-FFF2-40B4-BE49-F238E27FC236}">
+                <a16:creationId xmlns:a16="http://schemas.microsoft.com/office/drawing/2014/main" id="{F3565B0E-85EC-C1F0-9D40-0C6F287C30EB}"/>
+              </a:ext>
+            </a:extLst>
+          </p:cNvPr>
+          <p:cNvSpPr>
+            <a:spLocks noGrp="1"/>
+          </p:cNvSpPr>
+          <p:nvPr>
+            <p:ph type="title"/>
+          </p:nvPr>
+        </p:nvSpPr>
+        <p:spPr/>
+        <p:txBody>
+          <a:bodyPr/>
+          <a:lstStyle/>
+          <a:p>
+            <a:r>
+              <a:rPr lang="en-US" dirty="0"/>
+              <a:t>Refactoring the design system library HFA DS</a:t>
+            </a:r>
+          </a:p>
+        </p:txBody>
+      </p:sp>
+      <p:pic>
+        <p:nvPicPr>
+          <p:cNvPr id="4" name="Picture 3">
+            <a:extLst>
+              <a:ext uri="{FF2B5EF4-FFF2-40B4-BE49-F238E27FC236}">
+                <a16:creationId xmlns:a16="http://schemas.microsoft.com/office/drawing/2014/main" id="{50054214-4128-FA97-4963-AE24CC8545D9}"/>
+              </a:ext>
+            </a:extLst>
+          </p:cNvPr>
+          <p:cNvPicPr>
+            <a:picLocks noChangeAspect="1"/>
+          </p:cNvPicPr>
+          <p:nvPr/>
+        </p:nvPicPr>
+        <p:blipFill>
+          <a:blip r:embed="rId2"/>
+          <a:stretch>
+            <a:fillRect/>
+          </a:stretch>
+        </p:blipFill>
+        <p:spPr>
+          <a:xfrm>
+            <a:off x="4298092" y="1487504"/>
+            <a:ext cx="7772400" cy="5118665"/>
+          </a:xfrm>
+          <a:prstGeom prst="rect">
+            <a:avLst/>
+          </a:prstGeom>
+        </p:spPr>
+      </p:pic>
+    </p:spTree>
+    <p:extLst>
+      <p:ext uri="{BB962C8B-B14F-4D97-AF65-F5344CB8AC3E}">
+        <p14:creationId xmlns:p14="http://schemas.microsoft.com/office/powerpoint/2010/main" val="3747206509"/>
+      </p:ext>
+    </p:extLst>
+  </p:cSld>
+  <p:clrMapOvr>
+    <a:masterClrMapping/>
+  </p:clrMapOvr>
+</p:sld>
+</file>
+
+<file path=ppt/slides/slide4.xml><?xml version="1.0" encoding="utf-8"?>
+<p:sld xmlns:a="http://schemas.openxmlformats.org/drawingml/2006/main" xmlns:r="http://schemas.openxmlformats.org/officeDocument/2006/relationships" xmlns:p="http://schemas.openxmlformats.org/presentationml/2006/main">
+  <p:cSld>
+    <p:spTree>
+      <p:nvGrpSpPr>
+        <p:cNvPr id="1" name=""/>
+        <p:cNvGrpSpPr/>
+        <p:nvPr/>
+      </p:nvGrpSpPr>
+      <p:grpSpPr>
+        <a:xfrm>
+          <a:off x="0" y="0"/>
+          <a:ext cx="0" cy="0"/>
+          <a:chOff x="0" y="0"/>
+          <a:chExt cx="0" cy="0"/>
+        </a:xfrm>
+      </p:grpSpPr>
+      <p:sp>
+        <p:nvSpPr>
+          <p:cNvPr id="2" name="Title 1">
+            <a:extLst>
+              <a:ext uri="{FF2B5EF4-FFF2-40B4-BE49-F238E27FC236}">
+                <a16:creationId xmlns:a16="http://schemas.microsoft.com/office/drawing/2014/main" id="{F1CECDB1-7D3A-7A83-5B7D-A007AB72549C}"/>
+              </a:ext>
+            </a:extLst>
+          </p:cNvPr>
+          <p:cNvSpPr>
+            <a:spLocks noGrp="1"/>
+          </p:cNvSpPr>
+          <p:nvPr>
+            <p:ph type="title"/>
+          </p:nvPr>
+        </p:nvSpPr>
+        <p:spPr/>
+        <p:txBody>
+          <a:bodyPr/>
+          <a:lstStyle/>
+          <a:p>
+            <a:r>
+              <a:rPr lang="en-US" dirty="0"/>
+              <a:t>Execution order</a:t>
+            </a:r>
+          </a:p>
+        </p:txBody>
+      </p:sp>
+      <p:pic>
+        <p:nvPicPr>
+          <p:cNvPr id="4" name="Content Placeholder 3">
+            <a:extLst>
+              <a:ext uri="{FF2B5EF4-FFF2-40B4-BE49-F238E27FC236}">
+                <a16:creationId xmlns:a16="http://schemas.microsoft.com/office/drawing/2014/main" id="{5D2584DA-DC7E-8B34-683C-9704D8C5F166}"/>
+              </a:ext>
+            </a:extLst>
+          </p:cNvPr>
+          <p:cNvPicPr>
+            <a:picLocks noGrp="1" noChangeAspect="1"/>
+          </p:cNvPicPr>
+          <p:nvPr>
+            <p:ph idx="1"/>
+          </p:nvPr>
+        </p:nvPicPr>
+        <p:blipFill>
+          <a:blip r:embed="rId2"/>
+          <a:stretch>
+            <a:fillRect/>
+          </a:stretch>
+        </p:blipFill>
+        <p:spPr>
+          <a:xfrm>
+            <a:off x="3690304" y="1825625"/>
+            <a:ext cx="4811391" cy="4351338"/>
+          </a:xfrm>
+          <a:prstGeom prst="rect">
+            <a:avLst/>
+          </a:prstGeom>
+        </p:spPr>
+      </p:pic>
+    </p:spTree>
+    <p:extLst>
+      <p:ext uri="{BB962C8B-B14F-4D97-AF65-F5344CB8AC3E}">
+        <p14:creationId xmlns:p14="http://schemas.microsoft.com/office/powerpoint/2010/main" val="3679306684"/>
+      </p:ext>
+    </p:extLst>
+  </p:cSld>
+  <p:clrMapOvr>
+    <a:masterClrMapping/>
+  </p:clrMapOvr>
+</p:sld>
+</file>
+
+<file path=ppt/slides/slide5.xml><?xml version="1.0" encoding="utf-8"?>
+<p:sld xmlns:a="http://schemas.openxmlformats.org/drawingml/2006/main" xmlns:r="http://schemas.openxmlformats.org/officeDocument/2006/relationships" xmlns:p="http://schemas.openxmlformats.org/presentationml/2006/main">
+  <p:cSld>
+    <p:spTree>
+      <p:nvGrpSpPr>
+        <p:cNvPr id="1" name=""/>
+        <p:cNvGrpSpPr/>
+        <p:nvPr/>
+      </p:nvGrpSpPr>
+      <p:grpSpPr>
+        <a:xfrm>
+          <a:off x="0" y="0"/>
+          <a:ext cx="0" cy="0"/>
+          <a:chOff x="0" y="0"/>
+          <a:chExt cx="0" cy="0"/>
+        </a:xfrm>
+      </p:grpSpPr>
+      <p:sp>
+        <p:nvSpPr>
+          <p:cNvPr id="2" name="Title 1">
+            <a:extLst>
+              <a:ext uri="{FF2B5EF4-FFF2-40B4-BE49-F238E27FC236}">
+                <a16:creationId xmlns:a16="http://schemas.microsoft.com/office/drawing/2014/main" id="{38491A15-B9B9-97A3-92B4-CAE77F2E2C29}"/>
+              </a:ext>
+            </a:extLst>
+          </p:cNvPr>
+          <p:cNvSpPr>
+            <a:spLocks noGrp="1"/>
+          </p:cNvSpPr>
+          <p:nvPr>
+            <p:ph type="title"/>
+          </p:nvPr>
+        </p:nvSpPr>
+        <p:spPr/>
+        <p:txBody>
+          <a:bodyPr/>
+          <a:lstStyle/>
+          <a:p>
+            <a:r>
+              <a:rPr lang="en-US"/>
+              <a:t>Plan To-dos</a:t>
+            </a:r>
+            <a:endParaRPr lang="en-US" dirty="0"/>
+          </a:p>
+        </p:txBody>
+      </p:sp>
+      <p:pic>
+        <p:nvPicPr>
+          <p:cNvPr id="5" name="Content Placeholder 4">
+            <a:extLst>
+              <a:ext uri="{FF2B5EF4-FFF2-40B4-BE49-F238E27FC236}">
+                <a16:creationId xmlns:a16="http://schemas.microsoft.com/office/drawing/2014/main" id="{BEABF87E-C70D-9F6A-7E5C-93B2F011562F}"/>
+              </a:ext>
+            </a:extLst>
+          </p:cNvPr>
+          <p:cNvPicPr>
+            <a:picLocks noGrp="1" noChangeAspect="1"/>
+          </p:cNvPicPr>
+          <p:nvPr>
+            <p:ph idx="1"/>
+          </p:nvPr>
+        </p:nvPicPr>
+        <p:blipFill>
+          <a:blip r:embed="rId2"/>
+          <a:stretch>
+            <a:fillRect/>
+          </a:stretch>
+        </p:blipFill>
+        <p:spPr>
+          <a:xfrm>
+            <a:off x="1276350" y="1918494"/>
+            <a:ext cx="9639300" cy="4165600"/>
+          </a:xfrm>
+          <a:prstGeom prst="rect">
+            <a:avLst/>
+          </a:prstGeom>
+        </p:spPr>
+      </p:pic>
+    </p:spTree>
+    <p:extLst>
+      <p:ext uri="{BB962C8B-B14F-4D97-AF65-F5344CB8AC3E}">
+        <p14:creationId xmlns:p14="http://schemas.microsoft.com/office/powerpoint/2010/main" val="1360940721"/>
+      </p:ext>
+    </p:extLst>
+  </p:cSld>
+  <p:clrMapOvr>
+    <a:masterClrMapping/>
+  </p:clrMapOvr>
+</p:sld>
+</file>
+
+<file path=ppt/slides/slide6.xml><?xml version="1.0" encoding="utf-8"?>
+<p:sld xmlns:a="http://schemas.openxmlformats.org/drawingml/2006/main" xmlns:r="http://schemas.openxmlformats.org/officeDocument/2006/relationships" xmlns:p="http://schemas.openxmlformats.org/presentationml/2006/main">
+  <p:cSld>
+    <p:spTree>
+      <p:nvGrpSpPr>
+        <p:cNvPr id="1" name=""/>
+        <p:cNvGrpSpPr/>
+        <p:nvPr/>
+      </p:nvGrpSpPr>
+      <p:grpSpPr>
+        <a:xfrm>
+          <a:off x="0" y="0"/>
+          <a:ext cx="0" cy="0"/>
+          <a:chOff x="0" y="0"/>
+          <a:chExt cx="0" cy="0"/>
+        </a:xfrm>
+      </p:grpSpPr>
+      <p:sp>
+        <p:nvSpPr>
+          <p:cNvPr id="2" name="Title 1">
+            <a:extLst>
+              <a:ext uri="{FF2B5EF4-FFF2-40B4-BE49-F238E27FC236}">
+                <a16:creationId xmlns:a16="http://schemas.microsoft.com/office/drawing/2014/main" id="{A10DAAD5-D6ED-BFCC-B880-C576B6937BC3}"/>
+              </a:ext>
+            </a:extLst>
+          </p:cNvPr>
+          <p:cNvSpPr>
+            <a:spLocks noGrp="1"/>
+          </p:cNvSpPr>
+          <p:nvPr>
+            <p:ph type="title"/>
+          </p:nvPr>
+        </p:nvSpPr>
+        <p:spPr/>
+        <p:txBody>
+          <a:bodyPr/>
+          <a:lstStyle/>
+          <a:p>
+            <a:r>
+              <a:rPr lang="en-US" dirty="0"/>
+              <a:t>Not completely smooth</a:t>
+            </a:r>
+          </a:p>
+        </p:txBody>
+      </p:sp>
+      <p:pic>
+        <p:nvPicPr>
+          <p:cNvPr id="4" name="Content Placeholder 3">
+            <a:extLst>
+              <a:ext uri="{FF2B5EF4-FFF2-40B4-BE49-F238E27FC236}">
+                <a16:creationId xmlns:a16="http://schemas.microsoft.com/office/drawing/2014/main" id="{8741317B-D7ED-B9E7-07C9-6A9F48B48040}"/>
+              </a:ext>
+            </a:extLst>
+          </p:cNvPr>
+          <p:cNvPicPr>
+            <a:picLocks noGrp="1" noChangeAspect="1"/>
+          </p:cNvPicPr>
+          <p:nvPr>
+            <p:ph idx="1"/>
+          </p:nvPr>
+        </p:nvPicPr>
+        <p:blipFill>
+          <a:blip r:embed="rId2"/>
+          <a:stretch>
+            <a:fillRect/>
+          </a:stretch>
+        </p:blipFill>
+        <p:spPr>
+          <a:xfrm>
+            <a:off x="838200" y="1926840"/>
+            <a:ext cx="4711700" cy="1092200"/>
+          </a:xfrm>
+          <a:prstGeom prst="rect">
+            <a:avLst/>
+          </a:prstGeom>
+        </p:spPr>
+      </p:pic>
+      <p:pic>
+        <p:nvPicPr>
+          <p:cNvPr id="5" name="Picture 4">
+            <a:extLst>
+              <a:ext uri="{FF2B5EF4-FFF2-40B4-BE49-F238E27FC236}">
+                <a16:creationId xmlns:a16="http://schemas.microsoft.com/office/drawing/2014/main" id="{A1EA77B2-1690-C991-E211-5DD67C1A2D7A}"/>
+              </a:ext>
+            </a:extLst>
+          </p:cNvPr>
+          <p:cNvPicPr>
+            <a:picLocks noChangeAspect="1"/>
+          </p:cNvPicPr>
+          <p:nvPr/>
+        </p:nvPicPr>
+        <p:blipFill>
+          <a:blip r:embed="rId3"/>
+          <a:stretch>
+            <a:fillRect/>
+          </a:stretch>
+        </p:blipFill>
+        <p:spPr>
+          <a:xfrm>
+            <a:off x="6520906" y="1628775"/>
+            <a:ext cx="5054600" cy="4864100"/>
+          </a:xfrm>
+          <a:prstGeom prst="rect">
+            <a:avLst/>
+          </a:prstGeom>
+        </p:spPr>
+      </p:pic>
+      <p:pic>
+        <p:nvPicPr>
+          <p:cNvPr id="6" name="Picture 5">
+            <a:extLst>
+              <a:ext uri="{FF2B5EF4-FFF2-40B4-BE49-F238E27FC236}">
+                <a16:creationId xmlns:a16="http://schemas.microsoft.com/office/drawing/2014/main" id="{39ADA52D-F07E-7A11-8007-0385700D11ED}"/>
+              </a:ext>
+            </a:extLst>
+          </p:cNvPr>
+          <p:cNvPicPr>
+            <a:picLocks noChangeAspect="1"/>
+          </p:cNvPicPr>
+          <p:nvPr/>
+        </p:nvPicPr>
+        <p:blipFill>
+          <a:blip r:embed="rId4"/>
+          <a:stretch>
+            <a:fillRect/>
+          </a:stretch>
+        </p:blipFill>
+        <p:spPr>
+          <a:xfrm>
+            <a:off x="1168386" y="3255192"/>
+            <a:ext cx="4381514" cy="3473835"/>
+          </a:xfrm>
+          <a:prstGeom prst="rect">
+            <a:avLst/>
+          </a:prstGeom>
+        </p:spPr>
+      </p:pic>
+    </p:spTree>
+    <p:extLst>
+      <p:ext uri="{BB962C8B-B14F-4D97-AF65-F5344CB8AC3E}">
+        <p14:creationId xmlns:p14="http://schemas.microsoft.com/office/powerpoint/2010/main" val="3762900069"/>
+      </p:ext>
+    </p:extLst>
+  </p:cSld>
+  <p:clrMapOvr>
+    <a:masterClrMapping/>
+  </p:clrMapOvr>
+</p:sld>
+</file>
+
+<file path=ppt/slides/slide7.xml><?xml version="1.0" encoding="utf-8"?>
+<p:sld xmlns:a="http://schemas.openxmlformats.org/drawingml/2006/main" xmlns:r="http://schemas.openxmlformats.org/officeDocument/2006/relationships" xmlns:p="http://schemas.openxmlformats.org/presentationml/2006/main">
+  <p:cSld>
+    <p:spTree>
+      <p:nvGrpSpPr>
+        <p:cNvPr id="1" name=""/>
+        <p:cNvGrpSpPr/>
+        <p:nvPr/>
+      </p:nvGrpSpPr>
+      <p:grpSpPr>
+        <a:xfrm>
+          <a:off x="0" y="0"/>
+          <a:ext cx="0" cy="0"/>
+          <a:chOff x="0" y="0"/>
+          <a:chExt cx="0" cy="0"/>
+        </a:xfrm>
+      </p:grpSpPr>
+      <p:sp>
+        <p:nvSpPr>
+          <p:cNvPr id="2" name="Title 1">
+            <a:extLst>
+              <a:ext uri="{FF2B5EF4-FFF2-40B4-BE49-F238E27FC236}">
+                <a16:creationId xmlns:a16="http://schemas.microsoft.com/office/drawing/2014/main" id="{5C4C6A4B-A9A6-09E8-6BF4-2F3F16730C4D}"/>
+              </a:ext>
+            </a:extLst>
+          </p:cNvPr>
+          <p:cNvSpPr>
+            <a:spLocks noGrp="1"/>
+          </p:cNvSpPr>
+          <p:nvPr>
+            <p:ph type="title"/>
+          </p:nvPr>
+        </p:nvSpPr>
+        <p:spPr/>
+        <p:txBody>
+          <a:bodyPr/>
+          <a:lstStyle/>
+          <a:p>
+            <a:r>
+              <a:rPr lang="en-US" dirty="0"/>
+              <a:t>Component swap – need of UX</a:t>
+            </a:r>
+          </a:p>
+        </p:txBody>
+      </p:sp>
+      <p:sp>
+        <p:nvSpPr>
+          <p:cNvPr id="3" name="Content Placeholder 2">
+            <a:extLst>
+              <a:ext uri="{FF2B5EF4-FFF2-40B4-BE49-F238E27FC236}">
+                <a16:creationId xmlns:a16="http://schemas.microsoft.com/office/drawing/2014/main" id="{8835C56B-BA69-4DE7-8A10-AC5FB8BA44D0}"/>
+              </a:ext>
+            </a:extLst>
+          </p:cNvPr>
+          <p:cNvSpPr>
+            <a:spLocks noGrp="1"/>
+          </p:cNvSpPr>
+          <p:nvPr>
+            <p:ph idx="1"/>
+          </p:nvPr>
+        </p:nvSpPr>
+        <p:spPr/>
+        <p:txBody>
+          <a:bodyPr>
+            <a:normAutofit fontScale="70000" lnSpcReduction="20000"/>
+          </a:bodyPr>
+          <a:lstStyle/>
+          <a:p>
+            <a:r>
+              <a:rPr lang="en-US" b="1" dirty="0"/>
+              <a:t>Title:</a:t>
+            </a:r>
+            <a:r>
+              <a:rPr lang="en-US" dirty="0"/>
+              <a:t> Swap component picker should show variant property values, not duplicate component names</a:t>
+            </a:r>
+          </a:p>
+          <a:p>
+            <a:r>
+              <a:rPr lang="en-US" b="1" dirty="0"/>
+              <a:t>Problem:</a:t>
+            </a:r>
+            <a:r>
+              <a:rPr lang="en-US" dirty="0"/>
+              <a:t> When swapping to a component with variants (e.g. HFA DS </a:t>
+            </a:r>
+            <a:r>
+              <a:rPr lang="en-US" b="1" dirty="0"/>
+              <a:t>Action Button</a:t>
+            </a:r>
+            <a:r>
+              <a:rPr lang="en-US" dirty="0"/>
+              <a:t>), the picker lists many rows all named “Action Button” with no Type/State (or Strength/Status) labels — indistinguishable without trial and error.</a:t>
+            </a:r>
+          </a:p>
+          <a:p>
+            <a:r>
+              <a:rPr lang="en-US" b="1" dirty="0"/>
+              <a:t>Expected:</a:t>
+            </a:r>
+            <a:r>
+              <a:rPr lang="en-US" dirty="0"/>
+              <a:t> Each row shows variant props (e.g. Action Button · Cause · Unselected) or groups variants under one entry with a variant selector in the picker.</a:t>
+            </a:r>
+          </a:p>
+          <a:p>
+            <a:r>
+              <a:rPr lang="en-US" b="1" dirty="0"/>
+              <a:t>Workaround today:</a:t>
+            </a:r>
+            <a:r>
+              <a:rPr lang="en-US" dirty="0"/>
+              <a:t> Swap to any entry in the family, then set </a:t>
+            </a:r>
+            <a:r>
+              <a:rPr lang="en-US" b="1" dirty="0"/>
+              <a:t>Type / State</a:t>
+            </a:r>
+            <a:r>
+              <a:rPr lang="en-US" dirty="0"/>
+              <a:t> (or other props) in the Design panel.</a:t>
+            </a:r>
+          </a:p>
+          <a:p>
+            <a:r>
+              <a:rPr lang="en-US" b="1" dirty="0"/>
+              <a:t>Where to file:</a:t>
+            </a:r>
+            <a:endParaRPr lang="en-US" dirty="0"/>
+          </a:p>
+          <a:p>
+            <a:pPr lvl="0"/>
+            <a:r>
+              <a:rPr lang="en-US" dirty="0"/>
+              <a:t>Comment on the </a:t>
+            </a:r>
+            <a:r>
+              <a:rPr lang="en-US" dirty="0">
+                <a:hlinkClick r:id="rId2"/>
+              </a:rPr>
+              <a:t>community thread</a:t>
+            </a:r>
+            <a:r>
+              <a:rPr lang="en-US" dirty="0"/>
+              <a:t>, or</a:t>
+            </a:r>
+          </a:p>
+          <a:p>
+            <a:pPr lvl="0"/>
+            <a:r>
+              <a:rPr lang="en-US" dirty="0"/>
+              <a:t>New issue at </a:t>
+            </a:r>
+            <a:r>
+              <a:rPr lang="en-US" dirty="0">
+                <a:hlinkClick r:id="rId3"/>
+              </a:rPr>
+              <a:t>github.com/penpot/penpot/issues</a:t>
+            </a:r>
+            <a:r>
+              <a:rPr lang="en-US" dirty="0"/>
+              <a:t> with label enhancement and a screenshot like yours.</a:t>
+            </a:r>
+          </a:p>
+          <a:p>
+            <a:r>
+              <a:rPr lang="en-US" dirty="0"/>
+              <a:t>That’s a fair report — the swap search was improved in </a:t>
+            </a:r>
+            <a:r>
+              <a:rPr lang="en-US" dirty="0">
+                <a:hlinkClick r:id="rId4"/>
+              </a:rPr>
+              <a:t>PR #3750</a:t>
+            </a:r>
+            <a:r>
+              <a:rPr lang="en-US" dirty="0"/>
+              <a:t>, but </a:t>
+            </a:r>
+            <a:r>
+              <a:rPr lang="en-US" b="1" dirty="0"/>
+              <a:t>variant labels in the swap list</a:t>
+            </a:r>
+            <a:r>
+              <a:rPr lang="en-US" dirty="0"/>
+              <a:t> still aren’t there.</a:t>
+            </a:r>
+          </a:p>
+          <a:p>
+            <a:endParaRPr lang="en-US" dirty="0"/>
+          </a:p>
+        </p:txBody>
+      </p:sp>
+    </p:spTree>
+    <p:extLst>
+      <p:ext uri="{BB962C8B-B14F-4D97-AF65-F5344CB8AC3E}">
+        <p14:creationId xmlns:p14="http://schemas.microsoft.com/office/powerpoint/2010/main" val="3811551630"/>
+      </p:ext>
+    </p:extLst>
+  </p:cSld>
+  <p:clrMapOvr>
+    <a:masterClrMapping/>
+  </p:clrMapOvr>
+</p:sld>
+</file>
+
+<file path=ppt/slides/slide8.xml><?xml version="1.0" encoding="utf-8"?>
+<p:sld xmlns:a="http://schemas.openxmlformats.org/drawingml/2006/main" xmlns:r="http://schemas.openxmlformats.org/officeDocument/2006/relationships" xmlns:p="http://schemas.openxmlformats.org/presentationml/2006/main">
+  <p:cSld>
+    <p:spTree>
+      <p:nvGrpSpPr>
+        <p:cNvPr id="1" name=""/>
+        <p:cNvGrpSpPr/>
+        <p:nvPr/>
+      </p:nvGrpSpPr>
+      <p:grpSpPr>
+        <a:xfrm>
+          <a:off x="0" y="0"/>
+          <a:ext cx="0" cy="0"/>
+          <a:chOff x="0" y="0"/>
+          <a:chExt cx="0" cy="0"/>
+        </a:xfrm>
+      </p:grpSpPr>
+      <p:sp>
+        <p:nvSpPr>
+          <p:cNvPr id="2" name="Title 1">
+            <a:extLst>
+              <a:ext uri="{FF2B5EF4-FFF2-40B4-BE49-F238E27FC236}">
+                <a16:creationId xmlns:a16="http://schemas.microsoft.com/office/drawing/2014/main" id="{C6CFE8D1-969A-BDF5-E496-43644B08DA0B}"/>
+              </a:ext>
+            </a:extLst>
+          </p:cNvPr>
+          <p:cNvSpPr>
+            <a:spLocks noGrp="1"/>
+          </p:cNvSpPr>
+          <p:nvPr>
+            <p:ph type="title"/>
+          </p:nvPr>
+        </p:nvSpPr>
+        <p:spPr/>
+        <p:txBody>
+          <a:bodyPr/>
+          <a:lstStyle/>
+          <a:p>
+            <a:r>
+              <a:rPr lang="en-US" dirty="0"/>
+              <a:t>Possible MCP Bug?</a:t>
+            </a:r>
+          </a:p>
+        </p:txBody>
+      </p:sp>
+      <p:sp>
+        <p:nvSpPr>
+          <p:cNvPr id="3" name="Content Placeholder 2">
+            <a:extLst>
+              <a:ext uri="{FF2B5EF4-FFF2-40B4-BE49-F238E27FC236}">
+                <a16:creationId xmlns:a16="http://schemas.microsoft.com/office/drawing/2014/main" id="{33E41D33-D379-6209-A358-C75E0902B1FD}"/>
+              </a:ext>
+            </a:extLst>
+          </p:cNvPr>
+          <p:cNvSpPr>
+            <a:spLocks noGrp="1"/>
+          </p:cNvSpPr>
+          <p:nvPr>
+            <p:ph idx="1"/>
+          </p:nvPr>
+        </p:nvSpPr>
+        <p:spPr/>
+        <p:txBody>
+          <a:bodyPr>
+            <a:normAutofit fontScale="85000" lnSpcReduction="20000"/>
+          </a:bodyPr>
+          <a:lstStyle/>
+          <a:p>
+            <a:r>
+              <a:rPr lang="en-US" b="1" dirty="0" err="1"/>
+              <a:t>Penpot</a:t>
+            </a:r>
+            <a:r>
+              <a:rPr lang="en-US" b="1" dirty="0"/>
+              <a:t> (</a:t>
+            </a:r>
+            <a:r>
+              <a:rPr lang="en-US" b="1" dirty="0" err="1"/>
+              <a:t>github.com</a:t>
+            </a:r>
+            <a:r>
+              <a:rPr lang="en-US" b="1" dirty="0"/>
+              <a:t>/</a:t>
+            </a:r>
+            <a:r>
+              <a:rPr lang="en-US" b="1" dirty="0" err="1"/>
+              <a:t>penpot</a:t>
+            </a:r>
+            <a:r>
+              <a:rPr lang="en-US" b="1" dirty="0"/>
+              <a:t>/</a:t>
+            </a:r>
+            <a:r>
+              <a:rPr lang="en-US" b="1" dirty="0" err="1"/>
+              <a:t>penpot</a:t>
+            </a:r>
+            <a:r>
+              <a:rPr lang="en-US" b="1" dirty="0"/>
+              <a:t>) — bugs</a:t>
+            </a:r>
+            <a:endParaRPr lang="en-US" dirty="0"/>
+          </a:p>
+          <a:p>
+            <a:pPr lvl="0"/>
+            <a:r>
+              <a:rPr lang="en-US" dirty="0"/>
+              <a:t>Connected library sometimes shows inflated component count (69 vs 13) until reload</a:t>
+            </a:r>
+          </a:p>
+          <a:p>
+            <a:pPr lvl="0"/>
+            <a:r>
+              <a:rPr lang="en-US" dirty="0"/>
+              <a:t>Swap fails with generic “Something wrong has happened” until library cache refresh</a:t>
+            </a:r>
+          </a:p>
+          <a:p>
+            <a:r>
+              <a:rPr lang="en-US" b="1" dirty="0" err="1"/>
+              <a:t>Penpot</a:t>
+            </a:r>
+            <a:r>
+              <a:rPr lang="en-US" b="1" dirty="0"/>
+              <a:t> — enhancement</a:t>
+            </a:r>
+            <a:r>
+              <a:rPr lang="en-US" dirty="0"/>
+              <a:t> 3. Swap picker should show variant props (Type/State, etc.) when a component has variants (HR.: not sure about this one – makes the interface </a:t>
+            </a:r>
+            <a:r>
+              <a:rPr lang="en-US" dirty="0" err="1"/>
+              <a:t>clutered</a:t>
+            </a:r>
+            <a:r>
+              <a:rPr lang="en-US" dirty="0"/>
+              <a:t> – but great feature if it </a:t>
+            </a:r>
+            <a:r>
+              <a:rPr lang="en-US"/>
+              <a:t>works in </a:t>
+            </a:r>
+            <a:r>
+              <a:rPr lang="en-US" dirty="0"/>
+              <a:t>MCP)</a:t>
+            </a:r>
+          </a:p>
+          <a:p>
+            <a:r>
+              <a:rPr lang="en-US" b="1" dirty="0" err="1"/>
+              <a:t>Penpot</a:t>
+            </a:r>
+            <a:r>
+              <a:rPr lang="en-US" b="1" dirty="0"/>
+              <a:t> MCP / plugin (if you use Cursor’s </a:t>
+            </a:r>
+            <a:r>
+              <a:rPr lang="en-US" b="1" dirty="0" err="1"/>
+              <a:t>Penpot</a:t>
+            </a:r>
+            <a:r>
+              <a:rPr lang="en-US" b="1" dirty="0"/>
+              <a:t> MCP) — bug</a:t>
+            </a:r>
+            <a:r>
+              <a:rPr lang="en-US" dirty="0"/>
+              <a:t> 4. </a:t>
+            </a:r>
+            <a:r>
+              <a:rPr lang="en-US" dirty="0" err="1"/>
+              <a:t>swapComponent</a:t>
+            </a:r>
+            <a:r>
+              <a:rPr lang="en-US" dirty="0"/>
+              <a:t>() succeeds but doesn’t change component().</a:t>
+            </a:r>
+            <a:r>
+              <a:rPr lang="en-US" dirty="0" err="1"/>
+              <a:t>libraryId</a:t>
+            </a:r>
+            <a:r>
+              <a:rPr lang="en-US" dirty="0"/>
+              <a:t> cross-library</a:t>
+            </a:r>
+            <a:br>
+              <a:rPr lang="en-US" dirty="0"/>
+            </a:br>
+            <a:r>
+              <a:rPr lang="en-US" dirty="0"/>
+              <a:t>5. </a:t>
+            </a:r>
+            <a:r>
+              <a:rPr lang="en-US" dirty="0" err="1"/>
+              <a:t>LibraryComponent.instance</a:t>
+            </a:r>
+            <a:r>
+              <a:rPr lang="en-US" dirty="0"/>
+              <a:t>() returns non-usable shapes from connected libraries</a:t>
+            </a:r>
+          </a:p>
+          <a:p>
+            <a:endParaRPr lang="en-US" dirty="0"/>
+          </a:p>
+        </p:txBody>
+      </p:sp>
+    </p:spTree>
+    <p:extLst>
+      <p:ext uri="{BB962C8B-B14F-4D97-AF65-F5344CB8AC3E}">
+        <p14:creationId xmlns:p14="http://schemas.microsoft.com/office/powerpoint/2010/main" val="59111721"/>
+      </p:ext>
+    </p:extLst>
+  </p:cSld>
+  <p:clrMapOvr>
+    <a:masterClrMapping/>
+  </p:clrMapOvr>
+</p:sld>
+</file>
+
 <file path=ppt/theme/theme1.xml><?xml version="1.0" encoding="utf-8"?>
 <a:theme xmlns:a="http://schemas.openxmlformats.org/drawingml/2006/main" name="Office Theme">
   <a:themeElements>

--- a/bowtie_design_notes.pptx
+++ b/bowtie_design_notes.pptx
@@ -6,13 +6,20 @@
   </p:sldMasterIdLst>
   <p:sldIdLst>
     <p:sldId id="256" r:id="rId2"/>
-    <p:sldId id="257" r:id="rId3"/>
-    <p:sldId id="258" r:id="rId4"/>
-    <p:sldId id="259" r:id="rId5"/>
-    <p:sldId id="260" r:id="rId6"/>
-    <p:sldId id="261" r:id="rId7"/>
-    <p:sldId id="262" r:id="rId8"/>
-    <p:sldId id="263" r:id="rId9"/>
+    <p:sldId id="264" r:id="rId3"/>
+    <p:sldId id="257" r:id="rId4"/>
+    <p:sldId id="258" r:id="rId5"/>
+    <p:sldId id="259" r:id="rId6"/>
+    <p:sldId id="260" r:id="rId7"/>
+    <p:sldId id="261" r:id="rId8"/>
+    <p:sldId id="262" r:id="rId9"/>
+    <p:sldId id="263" r:id="rId10"/>
+    <p:sldId id="265" r:id="rId11"/>
+    <p:sldId id="266" r:id="rId12"/>
+    <p:sldId id="267" r:id="rId13"/>
+    <p:sldId id="269" r:id="rId14"/>
+    <p:sldId id="268" r:id="rId15"/>
+    <p:sldId id="270" r:id="rId16"/>
   </p:sldIdLst>
   <p:sldSz cx="12192000" cy="6858000"/>
   <p:notesSz cx="6858000" cy="9144000"/>
@@ -122,7 +129,7 @@
 <file path=ppt/revisionInfo.xml><?xml version="1.0" encoding="utf-8"?>
 <p1510:revInfo xmlns:a="http://schemas.openxmlformats.org/drawingml/2006/main" xmlns:r="http://schemas.openxmlformats.org/officeDocument/2006/relationships" xmlns:p1510="http://schemas.microsoft.com/office/powerpoint/2015/10/main">
   <p1510:revLst>
-    <p1510:client id="{3BCA02BA-0FB2-DA4B-8BBC-CE8B401E8468}" v="15" dt="2026-07-21T21:23:00.041"/>
+    <p1510:client id="{3BCA02BA-0FB2-DA4B-8BBC-CE8B401E8468}" v="24" dt="2026-07-22T22:12:23.226"/>
   </p1510:revLst>
 </p1510:revInfo>
 </file>
@@ -131,8 +138,8 @@
 <pc:chgInfo xmlns:a="http://schemas.openxmlformats.org/drawingml/2006/main" xmlns:r="http://schemas.openxmlformats.org/officeDocument/2006/relationships" xmlns:ac="http://schemas.microsoft.com/office/drawing/2013/main/command" xmlns:pc="http://schemas.microsoft.com/office/powerpoint/2013/main/command">
   <pc:docChgLst>
     <pc:chgData name="Lars Pettersson" userId="bbe8ee3e1743ce4e" providerId="LiveId" clId="{76C9B083-C5CE-54A4-81E8-16672380D724}"/>
-    <pc:docChg chg="undo custSel addSld modSld">
-      <pc:chgData name="Lars Pettersson" userId="bbe8ee3e1743ce4e" providerId="LiveId" clId="{76C9B083-C5CE-54A4-81E8-16672380D724}" dt="2026-07-21T21:24:18.875" v="545" actId="20577"/>
+    <pc:docChg chg="undo custSel addSld modSld sldOrd">
+      <pc:chgData name="Lars Pettersson" userId="bbe8ee3e1743ce4e" providerId="LiveId" clId="{76C9B083-C5CE-54A4-81E8-16672380D724}" dt="2026-07-22T22:12:23.226" v="568"/>
       <pc:docMkLst>
         <pc:docMk/>
       </pc:docMkLst>
@@ -416,6 +423,231 @@
           </ac:spMkLst>
         </pc:spChg>
       </pc:sldChg>
+      <pc:sldChg chg="addSp delSp modSp new mod">
+        <pc:chgData name="Lars Pettersson" userId="bbe8ee3e1743ce4e" providerId="LiveId" clId="{76C9B083-C5CE-54A4-81E8-16672380D724}" dt="2026-07-22T09:02:22.941" v="548"/>
+        <pc:sldMkLst>
+          <pc:docMk/>
+          <pc:sldMk cId="1650482976" sldId="264"/>
+        </pc:sldMkLst>
+        <pc:spChg chg="del">
+          <ac:chgData name="Lars Pettersson" userId="bbe8ee3e1743ce4e" providerId="LiveId" clId="{76C9B083-C5CE-54A4-81E8-16672380D724}" dt="2026-07-22T09:02:03.432" v="547" actId="478"/>
+          <ac:spMkLst>
+            <pc:docMk/>
+            <pc:sldMk cId="1650482976" sldId="264"/>
+            <ac:spMk id="2" creationId="{54D4D2D6-1D52-F88B-EC7A-433C645E765E}"/>
+          </ac:spMkLst>
+        </pc:spChg>
+        <pc:spChg chg="del">
+          <ac:chgData name="Lars Pettersson" userId="bbe8ee3e1743ce4e" providerId="LiveId" clId="{76C9B083-C5CE-54A4-81E8-16672380D724}" dt="2026-07-22T09:02:03.432" v="547" actId="478"/>
+          <ac:spMkLst>
+            <pc:docMk/>
+            <pc:sldMk cId="1650482976" sldId="264"/>
+            <ac:spMk id="3" creationId="{DE454593-F4DF-683D-7462-CEDE51CB4437}"/>
+          </ac:spMkLst>
+        </pc:spChg>
+        <pc:picChg chg="add mod">
+          <ac:chgData name="Lars Pettersson" userId="bbe8ee3e1743ce4e" providerId="LiveId" clId="{76C9B083-C5CE-54A4-81E8-16672380D724}" dt="2026-07-22T09:02:22.941" v="548"/>
+          <ac:picMkLst>
+            <pc:docMk/>
+            <pc:sldMk cId="1650482976" sldId="264"/>
+            <ac:picMk id="4" creationId="{8E8615E9-AF47-9ECC-16FC-8191BD9D1CE3}"/>
+          </ac:picMkLst>
+        </pc:picChg>
+      </pc:sldChg>
+      <pc:sldChg chg="addSp delSp modSp new mod">
+        <pc:chgData name="Lars Pettersson" userId="bbe8ee3e1743ce4e" providerId="LiveId" clId="{76C9B083-C5CE-54A4-81E8-16672380D724}" dt="2026-07-22T21:56:35.147" v="551"/>
+        <pc:sldMkLst>
+          <pc:docMk/>
+          <pc:sldMk cId="1586328075" sldId="265"/>
+        </pc:sldMkLst>
+        <pc:spChg chg="del">
+          <ac:chgData name="Lars Pettersson" userId="bbe8ee3e1743ce4e" providerId="LiveId" clId="{76C9B083-C5CE-54A4-81E8-16672380D724}" dt="2026-07-22T21:56:34.552" v="550" actId="478"/>
+          <ac:spMkLst>
+            <pc:docMk/>
+            <pc:sldMk cId="1586328075" sldId="265"/>
+            <ac:spMk id="2" creationId="{DA390228-424F-0C7F-94DE-CA70C18F1CC8}"/>
+          </ac:spMkLst>
+        </pc:spChg>
+        <pc:spChg chg="del">
+          <ac:chgData name="Lars Pettersson" userId="bbe8ee3e1743ce4e" providerId="LiveId" clId="{76C9B083-C5CE-54A4-81E8-16672380D724}" dt="2026-07-22T21:56:34.552" v="550" actId="478"/>
+          <ac:spMkLst>
+            <pc:docMk/>
+            <pc:sldMk cId="1586328075" sldId="265"/>
+            <ac:spMk id="3" creationId="{7EA0401F-3486-8215-CBD2-9A338AF3508F}"/>
+          </ac:spMkLst>
+        </pc:spChg>
+        <pc:picChg chg="add mod">
+          <ac:chgData name="Lars Pettersson" userId="bbe8ee3e1743ce4e" providerId="LiveId" clId="{76C9B083-C5CE-54A4-81E8-16672380D724}" dt="2026-07-22T21:56:35.147" v="551"/>
+          <ac:picMkLst>
+            <pc:docMk/>
+            <pc:sldMk cId="1586328075" sldId="265"/>
+            <ac:picMk id="4" creationId="{00A3418D-F54E-9511-0CC1-626C987B9737}"/>
+          </ac:picMkLst>
+        </pc:picChg>
+      </pc:sldChg>
+      <pc:sldChg chg="addSp delSp new mod">
+        <pc:chgData name="Lars Pettersson" userId="bbe8ee3e1743ce4e" providerId="LiveId" clId="{76C9B083-C5CE-54A4-81E8-16672380D724}" dt="2026-07-22T21:58:07.771" v="554"/>
+        <pc:sldMkLst>
+          <pc:docMk/>
+          <pc:sldMk cId="3359188529" sldId="266"/>
+        </pc:sldMkLst>
+        <pc:spChg chg="del">
+          <ac:chgData name="Lars Pettersson" userId="bbe8ee3e1743ce4e" providerId="LiveId" clId="{76C9B083-C5CE-54A4-81E8-16672380D724}" dt="2026-07-22T21:58:07.174" v="553" actId="478"/>
+          <ac:spMkLst>
+            <pc:docMk/>
+            <pc:sldMk cId="3359188529" sldId="266"/>
+            <ac:spMk id="2" creationId="{FA7249C2-497F-5FB5-5CD0-375399EA8347}"/>
+          </ac:spMkLst>
+        </pc:spChg>
+        <pc:spChg chg="del">
+          <ac:chgData name="Lars Pettersson" userId="bbe8ee3e1743ce4e" providerId="LiveId" clId="{76C9B083-C5CE-54A4-81E8-16672380D724}" dt="2026-07-22T21:58:07.174" v="553" actId="478"/>
+          <ac:spMkLst>
+            <pc:docMk/>
+            <pc:sldMk cId="3359188529" sldId="266"/>
+            <ac:spMk id="3" creationId="{2EBEC353-A4FD-9647-99E7-8DE472A6FAB8}"/>
+          </ac:spMkLst>
+        </pc:spChg>
+        <pc:picChg chg="add">
+          <ac:chgData name="Lars Pettersson" userId="bbe8ee3e1743ce4e" providerId="LiveId" clId="{76C9B083-C5CE-54A4-81E8-16672380D724}" dt="2026-07-22T21:58:07.771" v="554"/>
+          <ac:picMkLst>
+            <pc:docMk/>
+            <pc:sldMk cId="3359188529" sldId="266"/>
+            <ac:picMk id="4" creationId="{42E316BF-0E33-D909-7ED5-918C0B3CBBEA}"/>
+          </ac:picMkLst>
+        </pc:picChg>
+      </pc:sldChg>
+      <pc:sldChg chg="addSp delSp modSp new mod">
+        <pc:chgData name="Lars Pettersson" userId="bbe8ee3e1743ce4e" providerId="LiveId" clId="{76C9B083-C5CE-54A4-81E8-16672380D724}" dt="2026-07-22T21:59:51.188" v="557"/>
+        <pc:sldMkLst>
+          <pc:docMk/>
+          <pc:sldMk cId="1458638347" sldId="267"/>
+        </pc:sldMkLst>
+        <pc:spChg chg="del">
+          <ac:chgData name="Lars Pettersson" userId="bbe8ee3e1743ce4e" providerId="LiveId" clId="{76C9B083-C5CE-54A4-81E8-16672380D724}" dt="2026-07-22T21:59:50.523" v="556" actId="478"/>
+          <ac:spMkLst>
+            <pc:docMk/>
+            <pc:sldMk cId="1458638347" sldId="267"/>
+            <ac:spMk id="2" creationId="{BA5C5117-B81D-46A9-88D1-B7C3C86284FC}"/>
+          </ac:spMkLst>
+        </pc:spChg>
+        <pc:spChg chg="del">
+          <ac:chgData name="Lars Pettersson" userId="bbe8ee3e1743ce4e" providerId="LiveId" clId="{76C9B083-C5CE-54A4-81E8-16672380D724}" dt="2026-07-22T21:59:50.523" v="556" actId="478"/>
+          <ac:spMkLst>
+            <pc:docMk/>
+            <pc:sldMk cId="1458638347" sldId="267"/>
+            <ac:spMk id="3" creationId="{F4315395-F81E-C2D9-6240-FF48EB7F36CC}"/>
+          </ac:spMkLst>
+        </pc:spChg>
+        <pc:picChg chg="add mod">
+          <ac:chgData name="Lars Pettersson" userId="bbe8ee3e1743ce4e" providerId="LiveId" clId="{76C9B083-C5CE-54A4-81E8-16672380D724}" dt="2026-07-22T21:59:51.188" v="557"/>
+          <ac:picMkLst>
+            <pc:docMk/>
+            <pc:sldMk cId="1458638347" sldId="267"/>
+            <ac:picMk id="4" creationId="{16015A6F-4D92-4DF2-9DAB-9E06607B59BE}"/>
+          </ac:picMkLst>
+        </pc:picChg>
+      </pc:sldChg>
+      <pc:sldChg chg="addSp delSp modSp new mod">
+        <pc:chgData name="Lars Pettersson" userId="bbe8ee3e1743ce4e" providerId="LiveId" clId="{76C9B083-C5CE-54A4-81E8-16672380D724}" dt="2026-07-22T22:12:15.667" v="565"/>
+        <pc:sldMkLst>
+          <pc:docMk/>
+          <pc:sldMk cId="2165640143" sldId="268"/>
+        </pc:sldMkLst>
+        <pc:spChg chg="del">
+          <ac:chgData name="Lars Pettersson" userId="bbe8ee3e1743ce4e" providerId="LiveId" clId="{76C9B083-C5CE-54A4-81E8-16672380D724}" dt="2026-07-22T22:10:42.697" v="559" actId="478"/>
+          <ac:spMkLst>
+            <pc:docMk/>
+            <pc:sldMk cId="2165640143" sldId="268"/>
+            <ac:spMk id="2" creationId="{6DCEF822-5E88-DD19-4EBB-7243DCDC58A1}"/>
+          </ac:spMkLst>
+        </pc:spChg>
+        <pc:spChg chg="del">
+          <ac:chgData name="Lars Pettersson" userId="bbe8ee3e1743ce4e" providerId="LiveId" clId="{76C9B083-C5CE-54A4-81E8-16672380D724}" dt="2026-07-22T22:10:42.697" v="559" actId="478"/>
+          <ac:spMkLst>
+            <pc:docMk/>
+            <pc:sldMk cId="2165640143" sldId="268"/>
+            <ac:spMk id="3" creationId="{C30DF9A6-3AEA-770E-FB11-B9D979C4B947}"/>
+          </ac:spMkLst>
+        </pc:spChg>
+        <pc:picChg chg="add mod">
+          <ac:chgData name="Lars Pettersson" userId="bbe8ee3e1743ce4e" providerId="LiveId" clId="{76C9B083-C5CE-54A4-81E8-16672380D724}" dt="2026-07-22T22:10:43.115" v="560"/>
+          <ac:picMkLst>
+            <pc:docMk/>
+            <pc:sldMk cId="2165640143" sldId="268"/>
+            <ac:picMk id="4" creationId="{9F9B0893-8F2C-D460-5B73-E92DB5AE045B}"/>
+          </ac:picMkLst>
+        </pc:picChg>
+        <pc:picChg chg="add">
+          <ac:chgData name="Lars Pettersson" userId="bbe8ee3e1743ce4e" providerId="LiveId" clId="{76C9B083-C5CE-54A4-81E8-16672380D724}" dt="2026-07-22T22:12:15.667" v="565"/>
+          <ac:picMkLst>
+            <pc:docMk/>
+            <pc:sldMk cId="2165640143" sldId="268"/>
+            <ac:picMk id="5" creationId="{6DC52F12-2FC7-AAAB-F693-FF2121DF445A}"/>
+          </ac:picMkLst>
+        </pc:picChg>
+      </pc:sldChg>
+      <pc:sldChg chg="addSp delSp modSp new mod ord">
+        <pc:chgData name="Lars Pettersson" userId="bbe8ee3e1743ce4e" providerId="LiveId" clId="{76C9B083-C5CE-54A4-81E8-16672380D724}" dt="2026-07-22T22:11:26.881" v="564" actId="20578"/>
+        <pc:sldMkLst>
+          <pc:docMk/>
+          <pc:sldMk cId="266269948" sldId="269"/>
+        </pc:sldMkLst>
+        <pc:spChg chg="del">
+          <ac:chgData name="Lars Pettersson" userId="bbe8ee3e1743ce4e" providerId="LiveId" clId="{76C9B083-C5CE-54A4-81E8-16672380D724}" dt="2026-07-22T22:11:22.377" v="562" actId="478"/>
+          <ac:spMkLst>
+            <pc:docMk/>
+            <pc:sldMk cId="266269948" sldId="269"/>
+            <ac:spMk id="2" creationId="{B48E2967-6FAD-80D9-29C1-9C70CBC10B39}"/>
+          </ac:spMkLst>
+        </pc:spChg>
+        <pc:spChg chg="del">
+          <ac:chgData name="Lars Pettersson" userId="bbe8ee3e1743ce4e" providerId="LiveId" clId="{76C9B083-C5CE-54A4-81E8-16672380D724}" dt="2026-07-22T22:11:22.377" v="562" actId="478"/>
+          <ac:spMkLst>
+            <pc:docMk/>
+            <pc:sldMk cId="266269948" sldId="269"/>
+            <ac:spMk id="3" creationId="{AA052D90-6155-3C67-6C72-0720BC471AA9}"/>
+          </ac:spMkLst>
+        </pc:spChg>
+        <pc:picChg chg="add mod">
+          <ac:chgData name="Lars Pettersson" userId="bbe8ee3e1743ce4e" providerId="LiveId" clId="{76C9B083-C5CE-54A4-81E8-16672380D724}" dt="2026-07-22T22:11:23.128" v="563"/>
+          <ac:picMkLst>
+            <pc:docMk/>
+            <pc:sldMk cId="266269948" sldId="269"/>
+            <ac:picMk id="4" creationId="{F5DB32A6-8EC6-4D87-5798-F1744FB5DF26}"/>
+          </ac:picMkLst>
+        </pc:picChg>
+      </pc:sldChg>
+      <pc:sldChg chg="addSp delSp new mod">
+        <pc:chgData name="Lars Pettersson" userId="bbe8ee3e1743ce4e" providerId="LiveId" clId="{76C9B083-C5CE-54A4-81E8-16672380D724}" dt="2026-07-22T22:12:23.226" v="568"/>
+        <pc:sldMkLst>
+          <pc:docMk/>
+          <pc:sldMk cId="1866145741" sldId="270"/>
+        </pc:sldMkLst>
+        <pc:spChg chg="del">
+          <ac:chgData name="Lars Pettersson" userId="bbe8ee3e1743ce4e" providerId="LiveId" clId="{76C9B083-C5CE-54A4-81E8-16672380D724}" dt="2026-07-22T22:12:21.438" v="567" actId="478"/>
+          <ac:spMkLst>
+            <pc:docMk/>
+            <pc:sldMk cId="1866145741" sldId="270"/>
+            <ac:spMk id="2" creationId="{B70BE380-3282-696D-9A2E-83131672256F}"/>
+          </ac:spMkLst>
+        </pc:spChg>
+        <pc:spChg chg="del">
+          <ac:chgData name="Lars Pettersson" userId="bbe8ee3e1743ce4e" providerId="LiveId" clId="{76C9B083-C5CE-54A4-81E8-16672380D724}" dt="2026-07-22T22:12:21.438" v="567" actId="478"/>
+          <ac:spMkLst>
+            <pc:docMk/>
+            <pc:sldMk cId="1866145741" sldId="270"/>
+            <ac:spMk id="3" creationId="{51F98190-98E5-2E66-62D9-DFD905A0FBB9}"/>
+          </ac:spMkLst>
+        </pc:spChg>
+        <pc:picChg chg="add">
+          <ac:chgData name="Lars Pettersson" userId="bbe8ee3e1743ce4e" providerId="LiveId" clId="{76C9B083-C5CE-54A4-81E8-16672380D724}" dt="2026-07-22T22:12:23.226" v="568"/>
+          <ac:picMkLst>
+            <pc:docMk/>
+            <pc:sldMk cId="1866145741" sldId="270"/>
+            <ac:picMk id="4" creationId="{E4A427EB-03A2-5111-1D91-F089701264C6}"/>
+          </ac:picMkLst>
+        </pc:picChg>
+      </pc:sldChg>
     </pc:docChg>
   </pc:docChgLst>
 </pc:chgInfo>
@@ -568,7 +800,7 @@
           <a:p>
             <a:fld id="{BF72FBC3-9AC7-554F-B508-118BD7145C7B}" type="datetimeFigureOut">
               <a:rPr lang="en-US" smtClean="0"/>
-              <a:t>7/21/26</a:t>
+              <a:t>7/22/26</a:t>
             </a:fld>
             <a:endParaRPr lang="en-US"/>
           </a:p>
@@ -766,7 +998,7 @@
           <a:p>
             <a:fld id="{BF72FBC3-9AC7-554F-B508-118BD7145C7B}" type="datetimeFigureOut">
               <a:rPr lang="en-US" smtClean="0"/>
-              <a:t>7/21/26</a:t>
+              <a:t>7/22/26</a:t>
             </a:fld>
             <a:endParaRPr lang="en-US"/>
           </a:p>
@@ -974,7 +1206,7 @@
           <a:p>
             <a:fld id="{BF72FBC3-9AC7-554F-B508-118BD7145C7B}" type="datetimeFigureOut">
               <a:rPr lang="en-US" smtClean="0"/>
-              <a:t>7/21/26</a:t>
+              <a:t>7/22/26</a:t>
             </a:fld>
             <a:endParaRPr lang="en-US"/>
           </a:p>
@@ -1172,7 +1404,7 @@
           <a:p>
             <a:fld id="{BF72FBC3-9AC7-554F-B508-118BD7145C7B}" type="datetimeFigureOut">
               <a:rPr lang="en-US" smtClean="0"/>
-              <a:t>7/21/26</a:t>
+              <a:t>7/22/26</a:t>
             </a:fld>
             <a:endParaRPr lang="en-US"/>
           </a:p>
@@ -1447,7 +1679,7 @@
           <a:p>
             <a:fld id="{BF72FBC3-9AC7-554F-B508-118BD7145C7B}" type="datetimeFigureOut">
               <a:rPr lang="en-US" smtClean="0"/>
-              <a:t>7/21/26</a:t>
+              <a:t>7/22/26</a:t>
             </a:fld>
             <a:endParaRPr lang="en-US"/>
           </a:p>
@@ -1712,7 +1944,7 @@
           <a:p>
             <a:fld id="{BF72FBC3-9AC7-554F-B508-118BD7145C7B}" type="datetimeFigureOut">
               <a:rPr lang="en-US" smtClean="0"/>
-              <a:t>7/21/26</a:t>
+              <a:t>7/22/26</a:t>
             </a:fld>
             <a:endParaRPr lang="en-US"/>
           </a:p>
@@ -2124,7 +2356,7 @@
           <a:p>
             <a:fld id="{BF72FBC3-9AC7-554F-B508-118BD7145C7B}" type="datetimeFigureOut">
               <a:rPr lang="en-US" smtClean="0"/>
-              <a:t>7/21/26</a:t>
+              <a:t>7/22/26</a:t>
             </a:fld>
             <a:endParaRPr lang="en-US"/>
           </a:p>
@@ -2265,7 +2497,7 @@
           <a:p>
             <a:fld id="{BF72FBC3-9AC7-554F-B508-118BD7145C7B}" type="datetimeFigureOut">
               <a:rPr lang="en-US" smtClean="0"/>
-              <a:t>7/21/26</a:t>
+              <a:t>7/22/26</a:t>
             </a:fld>
             <a:endParaRPr lang="en-US"/>
           </a:p>
@@ -2378,7 +2610,7 @@
           <a:p>
             <a:fld id="{BF72FBC3-9AC7-554F-B508-118BD7145C7B}" type="datetimeFigureOut">
               <a:rPr lang="en-US" smtClean="0"/>
-              <a:t>7/21/26</a:t>
+              <a:t>7/22/26</a:t>
             </a:fld>
             <a:endParaRPr lang="en-US"/>
           </a:p>
@@ -2689,7 +2921,7 @@
           <a:p>
             <a:fld id="{BF72FBC3-9AC7-554F-B508-118BD7145C7B}" type="datetimeFigureOut">
               <a:rPr lang="en-US" smtClean="0"/>
-              <a:t>7/21/26</a:t>
+              <a:t>7/22/26</a:t>
             </a:fld>
             <a:endParaRPr lang="en-US"/>
           </a:p>
@@ -2977,7 +3209,7 @@
           <a:p>
             <a:fld id="{BF72FBC3-9AC7-554F-B508-118BD7145C7B}" type="datetimeFigureOut">
               <a:rPr lang="en-US" smtClean="0"/>
-              <a:t>7/21/26</a:t>
+              <a:t>7/22/26</a:t>
             </a:fld>
             <a:endParaRPr lang="en-US"/>
           </a:p>
@@ -3218,7 +3450,7 @@
           <a:p>
             <a:fld id="{BF72FBC3-9AC7-554F-B508-118BD7145C7B}" type="datetimeFigureOut">
               <a:rPr lang="en-US" smtClean="0"/>
-              <a:t>7/21/26</a:t>
+              <a:t>7/22/26</a:t>
             </a:fld>
             <a:endParaRPr lang="en-US"/>
           </a:p>
@@ -3843,7 +4075,427 @@
 </p:sld>
 </file>
 
+<file path=ppt/slides/slide10.xml><?xml version="1.0" encoding="utf-8"?>
+<p:sld xmlns:a="http://schemas.openxmlformats.org/drawingml/2006/main" xmlns:r="http://schemas.openxmlformats.org/officeDocument/2006/relationships" xmlns:p="http://schemas.openxmlformats.org/presentationml/2006/main">
+  <p:cSld>
+    <p:spTree>
+      <p:nvGrpSpPr>
+        <p:cNvPr id="1" name=""/>
+        <p:cNvGrpSpPr/>
+        <p:nvPr/>
+      </p:nvGrpSpPr>
+      <p:grpSpPr>
+        <a:xfrm>
+          <a:off x="0" y="0"/>
+          <a:ext cx="0" cy="0"/>
+          <a:chOff x="0" y="0"/>
+          <a:chExt cx="0" cy="0"/>
+        </a:xfrm>
+      </p:grpSpPr>
+      <p:pic>
+        <p:nvPicPr>
+          <p:cNvPr id="4" name="Picture 3">
+            <a:extLst>
+              <a:ext uri="{FF2B5EF4-FFF2-40B4-BE49-F238E27FC236}">
+                <a16:creationId xmlns:a16="http://schemas.microsoft.com/office/drawing/2014/main" id="{00A3418D-F54E-9511-0CC1-626C987B9737}"/>
+              </a:ext>
+            </a:extLst>
+          </p:cNvPr>
+          <p:cNvPicPr>
+            <a:picLocks noChangeAspect="1"/>
+          </p:cNvPicPr>
+          <p:nvPr/>
+        </p:nvPicPr>
+        <p:blipFill>
+          <a:blip r:embed="rId2"/>
+          <a:stretch>
+            <a:fillRect/>
+          </a:stretch>
+        </p:blipFill>
+        <p:spPr>
+          <a:xfrm>
+            <a:off x="2209800" y="1757762"/>
+            <a:ext cx="7772400" cy="3342475"/>
+          </a:xfrm>
+          <a:prstGeom prst="rect">
+            <a:avLst/>
+          </a:prstGeom>
+        </p:spPr>
+      </p:pic>
+    </p:spTree>
+    <p:extLst>
+      <p:ext uri="{BB962C8B-B14F-4D97-AF65-F5344CB8AC3E}">
+        <p14:creationId xmlns:p14="http://schemas.microsoft.com/office/powerpoint/2010/main" val="1586328075"/>
+      </p:ext>
+    </p:extLst>
+  </p:cSld>
+  <p:clrMapOvr>
+    <a:masterClrMapping/>
+  </p:clrMapOvr>
+</p:sld>
+</file>
+
+<file path=ppt/slides/slide11.xml><?xml version="1.0" encoding="utf-8"?>
+<p:sld xmlns:a="http://schemas.openxmlformats.org/drawingml/2006/main" xmlns:r="http://schemas.openxmlformats.org/officeDocument/2006/relationships" xmlns:p="http://schemas.openxmlformats.org/presentationml/2006/main">
+  <p:cSld>
+    <p:spTree>
+      <p:nvGrpSpPr>
+        <p:cNvPr id="1" name=""/>
+        <p:cNvGrpSpPr/>
+        <p:nvPr/>
+      </p:nvGrpSpPr>
+      <p:grpSpPr>
+        <a:xfrm>
+          <a:off x="0" y="0"/>
+          <a:ext cx="0" cy="0"/>
+          <a:chOff x="0" y="0"/>
+          <a:chExt cx="0" cy="0"/>
+        </a:xfrm>
+      </p:grpSpPr>
+      <p:pic>
+        <p:nvPicPr>
+          <p:cNvPr id="4" name="Picture 3">
+            <a:extLst>
+              <a:ext uri="{FF2B5EF4-FFF2-40B4-BE49-F238E27FC236}">
+                <a16:creationId xmlns:a16="http://schemas.microsoft.com/office/drawing/2014/main" id="{42E316BF-0E33-D909-7ED5-918C0B3CBBEA}"/>
+              </a:ext>
+            </a:extLst>
+          </p:cNvPr>
+          <p:cNvPicPr>
+            <a:picLocks noChangeAspect="1"/>
+          </p:cNvPicPr>
+          <p:nvPr/>
+        </p:nvPicPr>
+        <p:blipFill>
+          <a:blip r:embed="rId2"/>
+          <a:stretch>
+            <a:fillRect/>
+          </a:stretch>
+        </p:blipFill>
+        <p:spPr>
+          <a:xfrm>
+            <a:off x="2479109" y="0"/>
+            <a:ext cx="7233781" cy="6858000"/>
+          </a:xfrm>
+          <a:prstGeom prst="rect">
+            <a:avLst/>
+          </a:prstGeom>
+        </p:spPr>
+      </p:pic>
+    </p:spTree>
+    <p:extLst>
+      <p:ext uri="{BB962C8B-B14F-4D97-AF65-F5344CB8AC3E}">
+        <p14:creationId xmlns:p14="http://schemas.microsoft.com/office/powerpoint/2010/main" val="3359188529"/>
+      </p:ext>
+    </p:extLst>
+  </p:cSld>
+  <p:clrMapOvr>
+    <a:masterClrMapping/>
+  </p:clrMapOvr>
+</p:sld>
+</file>
+
+<file path=ppt/slides/slide12.xml><?xml version="1.0" encoding="utf-8"?>
+<p:sld xmlns:a="http://schemas.openxmlformats.org/drawingml/2006/main" xmlns:r="http://schemas.openxmlformats.org/officeDocument/2006/relationships" xmlns:p="http://schemas.openxmlformats.org/presentationml/2006/main">
+  <p:cSld>
+    <p:spTree>
+      <p:nvGrpSpPr>
+        <p:cNvPr id="1" name=""/>
+        <p:cNvGrpSpPr/>
+        <p:nvPr/>
+      </p:nvGrpSpPr>
+      <p:grpSpPr>
+        <a:xfrm>
+          <a:off x="0" y="0"/>
+          <a:ext cx="0" cy="0"/>
+          <a:chOff x="0" y="0"/>
+          <a:chExt cx="0" cy="0"/>
+        </a:xfrm>
+      </p:grpSpPr>
+      <p:pic>
+        <p:nvPicPr>
+          <p:cNvPr id="4" name="Picture 3">
+            <a:extLst>
+              <a:ext uri="{FF2B5EF4-FFF2-40B4-BE49-F238E27FC236}">
+                <a16:creationId xmlns:a16="http://schemas.microsoft.com/office/drawing/2014/main" id="{16015A6F-4D92-4DF2-9DAB-9E06607B59BE}"/>
+              </a:ext>
+            </a:extLst>
+          </p:cNvPr>
+          <p:cNvPicPr>
+            <a:picLocks noChangeAspect="1"/>
+          </p:cNvPicPr>
+          <p:nvPr/>
+        </p:nvPicPr>
+        <p:blipFill>
+          <a:blip r:embed="rId2"/>
+          <a:stretch>
+            <a:fillRect/>
+          </a:stretch>
+        </p:blipFill>
+        <p:spPr>
+          <a:xfrm>
+            <a:off x="2209800" y="1987543"/>
+            <a:ext cx="7772400" cy="2882913"/>
+          </a:xfrm>
+          <a:prstGeom prst="rect">
+            <a:avLst/>
+          </a:prstGeom>
+        </p:spPr>
+      </p:pic>
+    </p:spTree>
+    <p:extLst>
+      <p:ext uri="{BB962C8B-B14F-4D97-AF65-F5344CB8AC3E}">
+        <p14:creationId xmlns:p14="http://schemas.microsoft.com/office/powerpoint/2010/main" val="1458638347"/>
+      </p:ext>
+    </p:extLst>
+  </p:cSld>
+  <p:clrMapOvr>
+    <a:masterClrMapping/>
+  </p:clrMapOvr>
+</p:sld>
+</file>
+
+<file path=ppt/slides/slide13.xml><?xml version="1.0" encoding="utf-8"?>
+<p:sld xmlns:a="http://schemas.openxmlformats.org/drawingml/2006/main" xmlns:r="http://schemas.openxmlformats.org/officeDocument/2006/relationships" xmlns:p="http://schemas.openxmlformats.org/presentationml/2006/main">
+  <p:cSld>
+    <p:spTree>
+      <p:nvGrpSpPr>
+        <p:cNvPr id="1" name=""/>
+        <p:cNvGrpSpPr/>
+        <p:nvPr/>
+      </p:nvGrpSpPr>
+      <p:grpSpPr>
+        <a:xfrm>
+          <a:off x="0" y="0"/>
+          <a:ext cx="0" cy="0"/>
+          <a:chOff x="0" y="0"/>
+          <a:chExt cx="0" cy="0"/>
+        </a:xfrm>
+      </p:grpSpPr>
+      <p:pic>
+        <p:nvPicPr>
+          <p:cNvPr id="4" name="Picture 3">
+            <a:extLst>
+              <a:ext uri="{FF2B5EF4-FFF2-40B4-BE49-F238E27FC236}">
+                <a16:creationId xmlns:a16="http://schemas.microsoft.com/office/drawing/2014/main" id="{F5DB32A6-8EC6-4D87-5798-F1744FB5DF26}"/>
+              </a:ext>
+            </a:extLst>
+          </p:cNvPr>
+          <p:cNvPicPr>
+            <a:picLocks noChangeAspect="1"/>
+          </p:cNvPicPr>
+          <p:nvPr/>
+        </p:nvPicPr>
+        <p:blipFill>
+          <a:blip r:embed="rId2"/>
+          <a:stretch>
+            <a:fillRect/>
+          </a:stretch>
+        </p:blipFill>
+        <p:spPr>
+          <a:xfrm>
+            <a:off x="2209800" y="313975"/>
+            <a:ext cx="7772400" cy="6230050"/>
+          </a:xfrm>
+          <a:prstGeom prst="rect">
+            <a:avLst/>
+          </a:prstGeom>
+        </p:spPr>
+      </p:pic>
+    </p:spTree>
+    <p:extLst>
+      <p:ext uri="{BB962C8B-B14F-4D97-AF65-F5344CB8AC3E}">
+        <p14:creationId xmlns:p14="http://schemas.microsoft.com/office/powerpoint/2010/main" val="266269948"/>
+      </p:ext>
+    </p:extLst>
+  </p:cSld>
+  <p:clrMapOvr>
+    <a:masterClrMapping/>
+  </p:clrMapOvr>
+</p:sld>
+</file>
+
+<file path=ppt/slides/slide14.xml><?xml version="1.0" encoding="utf-8"?>
+<p:sld xmlns:a="http://schemas.openxmlformats.org/drawingml/2006/main" xmlns:r="http://schemas.openxmlformats.org/officeDocument/2006/relationships" xmlns:p="http://schemas.openxmlformats.org/presentationml/2006/main">
+  <p:cSld>
+    <p:spTree>
+      <p:nvGrpSpPr>
+        <p:cNvPr id="1" name=""/>
+        <p:cNvGrpSpPr/>
+        <p:nvPr/>
+      </p:nvGrpSpPr>
+      <p:grpSpPr>
+        <a:xfrm>
+          <a:off x="0" y="0"/>
+          <a:ext cx="0" cy="0"/>
+          <a:chOff x="0" y="0"/>
+          <a:chExt cx="0" cy="0"/>
+        </a:xfrm>
+      </p:grpSpPr>
+      <p:pic>
+        <p:nvPicPr>
+          <p:cNvPr id="4" name="Picture 3">
+            <a:extLst>
+              <a:ext uri="{FF2B5EF4-FFF2-40B4-BE49-F238E27FC236}">
+                <a16:creationId xmlns:a16="http://schemas.microsoft.com/office/drawing/2014/main" id="{9F9B0893-8F2C-D460-5B73-E92DB5AE045B}"/>
+              </a:ext>
+            </a:extLst>
+          </p:cNvPr>
+          <p:cNvPicPr>
+            <a:picLocks noChangeAspect="1"/>
+          </p:cNvPicPr>
+          <p:nvPr/>
+        </p:nvPicPr>
+        <p:blipFill>
+          <a:blip r:embed="rId2"/>
+          <a:stretch>
+            <a:fillRect/>
+          </a:stretch>
+        </p:blipFill>
+        <p:spPr>
+          <a:xfrm>
+            <a:off x="2209800" y="911658"/>
+            <a:ext cx="7772400" cy="5034684"/>
+          </a:xfrm>
+          <a:prstGeom prst="rect">
+            <a:avLst/>
+          </a:prstGeom>
+        </p:spPr>
+      </p:pic>
+    </p:spTree>
+    <p:extLst>
+      <p:ext uri="{BB962C8B-B14F-4D97-AF65-F5344CB8AC3E}">
+        <p14:creationId xmlns:p14="http://schemas.microsoft.com/office/powerpoint/2010/main" val="2165640143"/>
+      </p:ext>
+    </p:extLst>
+  </p:cSld>
+  <p:clrMapOvr>
+    <a:masterClrMapping/>
+  </p:clrMapOvr>
+</p:sld>
+</file>
+
+<file path=ppt/slides/slide15.xml><?xml version="1.0" encoding="utf-8"?>
+<p:sld xmlns:a="http://schemas.openxmlformats.org/drawingml/2006/main" xmlns:r="http://schemas.openxmlformats.org/officeDocument/2006/relationships" xmlns:p="http://schemas.openxmlformats.org/presentationml/2006/main">
+  <p:cSld>
+    <p:spTree>
+      <p:nvGrpSpPr>
+        <p:cNvPr id="1" name=""/>
+        <p:cNvGrpSpPr/>
+        <p:nvPr/>
+      </p:nvGrpSpPr>
+      <p:grpSpPr>
+        <a:xfrm>
+          <a:off x="0" y="0"/>
+          <a:ext cx="0" cy="0"/>
+          <a:chOff x="0" y="0"/>
+          <a:chExt cx="0" cy="0"/>
+        </a:xfrm>
+      </p:grpSpPr>
+      <p:pic>
+        <p:nvPicPr>
+          <p:cNvPr id="4" name="Picture 3">
+            <a:extLst>
+              <a:ext uri="{FF2B5EF4-FFF2-40B4-BE49-F238E27FC236}">
+                <a16:creationId xmlns:a16="http://schemas.microsoft.com/office/drawing/2014/main" id="{E4A427EB-03A2-5111-1D91-F089701264C6}"/>
+              </a:ext>
+            </a:extLst>
+          </p:cNvPr>
+          <p:cNvPicPr>
+            <a:picLocks noChangeAspect="1"/>
+          </p:cNvPicPr>
+          <p:nvPr/>
+        </p:nvPicPr>
+        <p:blipFill>
+          <a:blip r:embed="rId2"/>
+          <a:stretch>
+            <a:fillRect/>
+          </a:stretch>
+        </p:blipFill>
+        <p:spPr>
+          <a:xfrm>
+            <a:off x="2553572" y="0"/>
+            <a:ext cx="7084855" cy="6858000"/>
+          </a:xfrm>
+          <a:prstGeom prst="rect">
+            <a:avLst/>
+          </a:prstGeom>
+        </p:spPr>
+      </p:pic>
+    </p:spTree>
+    <p:extLst>
+      <p:ext uri="{BB962C8B-B14F-4D97-AF65-F5344CB8AC3E}">
+        <p14:creationId xmlns:p14="http://schemas.microsoft.com/office/powerpoint/2010/main" val="1866145741"/>
+      </p:ext>
+    </p:extLst>
+  </p:cSld>
+  <p:clrMapOvr>
+    <a:masterClrMapping/>
+  </p:clrMapOvr>
+</p:sld>
+</file>
+
 <file path=ppt/slides/slide2.xml><?xml version="1.0" encoding="utf-8"?>
+<p:sld xmlns:a="http://schemas.openxmlformats.org/drawingml/2006/main" xmlns:r="http://schemas.openxmlformats.org/officeDocument/2006/relationships" xmlns:p="http://schemas.openxmlformats.org/presentationml/2006/main">
+  <p:cSld>
+    <p:spTree>
+      <p:nvGrpSpPr>
+        <p:cNvPr id="1" name=""/>
+        <p:cNvGrpSpPr/>
+        <p:nvPr/>
+      </p:nvGrpSpPr>
+      <p:grpSpPr>
+        <a:xfrm>
+          <a:off x="0" y="0"/>
+          <a:ext cx="0" cy="0"/>
+          <a:chOff x="0" y="0"/>
+          <a:chExt cx="0" cy="0"/>
+        </a:xfrm>
+      </p:grpSpPr>
+      <p:pic>
+        <p:nvPicPr>
+          <p:cNvPr id="4" name="Picture 3">
+            <a:extLst>
+              <a:ext uri="{FF2B5EF4-FFF2-40B4-BE49-F238E27FC236}">
+                <a16:creationId xmlns:a16="http://schemas.microsoft.com/office/drawing/2014/main" id="{8E8615E9-AF47-9ECC-16FC-8191BD9D1CE3}"/>
+              </a:ext>
+            </a:extLst>
+          </p:cNvPr>
+          <p:cNvPicPr>
+            <a:picLocks noChangeAspect="1"/>
+          </p:cNvPicPr>
+          <p:nvPr/>
+        </p:nvPicPr>
+        <p:blipFill>
+          <a:blip r:embed="rId2"/>
+          <a:stretch>
+            <a:fillRect/>
+          </a:stretch>
+        </p:blipFill>
+        <p:spPr>
+          <a:xfrm>
+            <a:off x="2209800" y="287265"/>
+            <a:ext cx="7772400" cy="6283470"/>
+          </a:xfrm>
+          <a:prstGeom prst="rect">
+            <a:avLst/>
+          </a:prstGeom>
+        </p:spPr>
+      </p:pic>
+    </p:spTree>
+    <p:extLst>
+      <p:ext uri="{BB962C8B-B14F-4D97-AF65-F5344CB8AC3E}">
+        <p14:creationId xmlns:p14="http://schemas.microsoft.com/office/powerpoint/2010/main" val="1650482976"/>
+      </p:ext>
+    </p:extLst>
+  </p:cSld>
+  <p:clrMapOvr>
+    <a:masterClrMapping/>
+  </p:clrMapOvr>
+</p:sld>
+</file>
+
+<file path=ppt/slides/slide3.xml><?xml version="1.0" encoding="utf-8"?>
 <p:sld xmlns:a="http://schemas.openxmlformats.org/drawingml/2006/main" xmlns:r="http://schemas.openxmlformats.org/officeDocument/2006/relationships" xmlns:p="http://schemas.openxmlformats.org/presentationml/2006/main">
   <p:cSld>
     <p:spTree>
@@ -3953,7 +4605,7 @@
 </p:sld>
 </file>
 
-<file path=ppt/slides/slide3.xml><?xml version="1.0" encoding="utf-8"?>
+<file path=ppt/slides/slide4.xml><?xml version="1.0" encoding="utf-8"?>
 <p:sld xmlns:a="http://schemas.openxmlformats.org/drawingml/2006/main" xmlns:r="http://schemas.openxmlformats.org/officeDocument/2006/relationships" xmlns:p="http://schemas.openxmlformats.org/presentationml/2006/main">
   <p:cSld>
     <p:spTree>
@@ -4041,7 +4693,7 @@
 </p:sld>
 </file>
 
-<file path=ppt/slides/slide4.xml><?xml version="1.0" encoding="utf-8"?>
+<file path=ppt/slides/slide5.xml><?xml version="1.0" encoding="utf-8"?>
 <p:sld xmlns:a="http://schemas.openxmlformats.org/drawingml/2006/main" xmlns:r="http://schemas.openxmlformats.org/officeDocument/2006/relationships" xmlns:p="http://schemas.openxmlformats.org/presentationml/2006/main">
   <p:cSld>
     <p:spTree>
@@ -4131,7 +4783,7 @@
 </p:sld>
 </file>
 
-<file path=ppt/slides/slide5.xml><?xml version="1.0" encoding="utf-8"?>
+<file path=ppt/slides/slide6.xml><?xml version="1.0" encoding="utf-8"?>
 <p:sld xmlns:a="http://schemas.openxmlformats.org/drawingml/2006/main" xmlns:r="http://schemas.openxmlformats.org/officeDocument/2006/relationships" xmlns:p="http://schemas.openxmlformats.org/presentationml/2006/main">
   <p:cSld>
     <p:spTree>
@@ -4222,7 +4874,7 @@
 </p:sld>
 </file>
 
-<file path=ppt/slides/slide6.xml><?xml version="1.0" encoding="utf-8"?>
+<file path=ppt/slides/slide7.xml><?xml version="1.0" encoding="utf-8"?>
 <p:sld xmlns:a="http://schemas.openxmlformats.org/drawingml/2006/main" xmlns:r="http://schemas.openxmlformats.org/officeDocument/2006/relationships" xmlns:p="http://schemas.openxmlformats.org/presentationml/2006/main">
   <p:cSld>
     <p:spTree>
@@ -4372,7 +5024,7 @@
 </p:sld>
 </file>
 
-<file path=ppt/slides/slide7.xml><?xml version="1.0" encoding="utf-8"?>
+<file path=ppt/slides/slide8.xml><?xml version="1.0" encoding="utf-8"?>
 <p:sld xmlns:a="http://schemas.openxmlformats.org/drawingml/2006/main" xmlns:r="http://schemas.openxmlformats.org/officeDocument/2006/relationships" xmlns:p="http://schemas.openxmlformats.org/presentationml/2006/main">
   <p:cSld>
     <p:spTree>
@@ -4578,7 +5230,7 @@
 </p:sld>
 </file>
 
-<file path=ppt/slides/slide8.xml><?xml version="1.0" encoding="utf-8"?>
+<file path=ppt/slides/slide9.xml><?xml version="1.0" encoding="utf-8"?>
 <p:sld xmlns:a="http://schemas.openxmlformats.org/drawingml/2006/main" xmlns:r="http://schemas.openxmlformats.org/officeDocument/2006/relationships" xmlns:p="http://schemas.openxmlformats.org/presentationml/2006/main">
   <p:cSld>
     <p:spTree>

--- a/bowtie_design_notes.pptx
+++ b/bowtie_design_notes.pptx
@@ -129,7 +129,7 @@
 <file path=ppt/revisionInfo.xml><?xml version="1.0" encoding="utf-8"?>
 <p1510:revInfo xmlns:a="http://schemas.openxmlformats.org/drawingml/2006/main" xmlns:r="http://schemas.openxmlformats.org/officeDocument/2006/relationships" xmlns:p1510="http://schemas.microsoft.com/office/powerpoint/2015/10/main">
   <p1510:revLst>
-    <p1510:client id="{3BCA02BA-0FB2-DA4B-8BBC-CE8B401E8468}" v="24" dt="2026-07-22T22:12:23.226"/>
+    <p1510:client id="{3BCA02BA-0FB2-DA4B-8BBC-CE8B401E8468}" v="25" dt="2026-07-22T22:30:20.709"/>
   </p1510:revLst>
 </p1510:revInfo>
 </file>
@@ -139,7 +139,7 @@
   <pc:docChgLst>
     <pc:chgData name="Lars Pettersson" userId="bbe8ee3e1743ce4e" providerId="LiveId" clId="{76C9B083-C5CE-54A4-81E8-16672380D724}"/>
     <pc:docChg chg="undo custSel addSld modSld sldOrd">
-      <pc:chgData name="Lars Pettersson" userId="bbe8ee3e1743ce4e" providerId="LiveId" clId="{76C9B083-C5CE-54A4-81E8-16672380D724}" dt="2026-07-22T22:12:23.226" v="568"/>
+      <pc:chgData name="Lars Pettersson" userId="bbe8ee3e1743ce4e" providerId="LiveId" clId="{76C9B083-C5CE-54A4-81E8-16672380D724}" dt="2026-07-22T22:30:34.399" v="573" actId="1076"/>
       <pc:docMkLst>
         <pc:docMk/>
       </pc:docMkLst>
@@ -617,8 +617,8 @@
           </ac:picMkLst>
         </pc:picChg>
       </pc:sldChg>
-      <pc:sldChg chg="addSp delSp new mod">
-        <pc:chgData name="Lars Pettersson" userId="bbe8ee3e1743ce4e" providerId="LiveId" clId="{76C9B083-C5CE-54A4-81E8-16672380D724}" dt="2026-07-22T22:12:23.226" v="568"/>
+      <pc:sldChg chg="addSp delSp modSp new mod">
+        <pc:chgData name="Lars Pettersson" userId="bbe8ee3e1743ce4e" providerId="LiveId" clId="{76C9B083-C5CE-54A4-81E8-16672380D724}" dt="2026-07-22T22:30:34.399" v="573" actId="1076"/>
         <pc:sldMkLst>
           <pc:docMk/>
           <pc:sldMk cId="1866145741" sldId="270"/>
@@ -629,6 +629,14 @@
             <pc:docMk/>
             <pc:sldMk cId="1866145741" sldId="270"/>
             <ac:spMk id="2" creationId="{B70BE380-3282-696D-9A2E-83131672256F}"/>
+          </ac:spMkLst>
+        </pc:spChg>
+        <pc:spChg chg="add mod">
+          <ac:chgData name="Lars Pettersson" userId="bbe8ee3e1743ce4e" providerId="LiveId" clId="{76C9B083-C5CE-54A4-81E8-16672380D724}" dt="2026-07-22T22:30:34.399" v="573" actId="1076"/>
+          <ac:spMkLst>
+            <pc:docMk/>
+            <pc:sldMk cId="1866145741" sldId="270"/>
+            <ac:spMk id="3" creationId="{1D0F1AC3-249D-012D-134B-E2FB0EFAF5DC}"/>
           </ac:spMkLst>
         </pc:spChg>
         <pc:spChg chg="del">
@@ -800,7 +808,7 @@
           <a:p>
             <a:fld id="{BF72FBC3-9AC7-554F-B508-118BD7145C7B}" type="datetimeFigureOut">
               <a:rPr lang="en-US" smtClean="0"/>
-              <a:t>7/22/26</a:t>
+              <a:t>7/23/26</a:t>
             </a:fld>
             <a:endParaRPr lang="en-US"/>
           </a:p>
@@ -998,7 +1006,7 @@
           <a:p>
             <a:fld id="{BF72FBC3-9AC7-554F-B508-118BD7145C7B}" type="datetimeFigureOut">
               <a:rPr lang="en-US" smtClean="0"/>
-              <a:t>7/22/26</a:t>
+              <a:t>7/23/26</a:t>
             </a:fld>
             <a:endParaRPr lang="en-US"/>
           </a:p>
@@ -1206,7 +1214,7 @@
           <a:p>
             <a:fld id="{BF72FBC3-9AC7-554F-B508-118BD7145C7B}" type="datetimeFigureOut">
               <a:rPr lang="en-US" smtClean="0"/>
-              <a:t>7/22/26</a:t>
+              <a:t>7/23/26</a:t>
             </a:fld>
             <a:endParaRPr lang="en-US"/>
           </a:p>
@@ -1404,7 +1412,7 @@
           <a:p>
             <a:fld id="{BF72FBC3-9AC7-554F-B508-118BD7145C7B}" type="datetimeFigureOut">
               <a:rPr lang="en-US" smtClean="0"/>
-              <a:t>7/22/26</a:t>
+              <a:t>7/23/26</a:t>
             </a:fld>
             <a:endParaRPr lang="en-US"/>
           </a:p>
@@ -1679,7 +1687,7 @@
           <a:p>
             <a:fld id="{BF72FBC3-9AC7-554F-B508-118BD7145C7B}" type="datetimeFigureOut">
               <a:rPr lang="en-US" smtClean="0"/>
-              <a:t>7/22/26</a:t>
+              <a:t>7/23/26</a:t>
             </a:fld>
             <a:endParaRPr lang="en-US"/>
           </a:p>
@@ -1944,7 +1952,7 @@
           <a:p>
             <a:fld id="{BF72FBC3-9AC7-554F-B508-118BD7145C7B}" type="datetimeFigureOut">
               <a:rPr lang="en-US" smtClean="0"/>
-              <a:t>7/22/26</a:t>
+              <a:t>7/23/26</a:t>
             </a:fld>
             <a:endParaRPr lang="en-US"/>
           </a:p>
@@ -2356,7 +2364,7 @@
           <a:p>
             <a:fld id="{BF72FBC3-9AC7-554F-B508-118BD7145C7B}" type="datetimeFigureOut">
               <a:rPr lang="en-US" smtClean="0"/>
-              <a:t>7/22/26</a:t>
+              <a:t>7/23/26</a:t>
             </a:fld>
             <a:endParaRPr lang="en-US"/>
           </a:p>
@@ -2497,7 +2505,7 @@
           <a:p>
             <a:fld id="{BF72FBC3-9AC7-554F-B508-118BD7145C7B}" type="datetimeFigureOut">
               <a:rPr lang="en-US" smtClean="0"/>
-              <a:t>7/22/26</a:t>
+              <a:t>7/23/26</a:t>
             </a:fld>
             <a:endParaRPr lang="en-US"/>
           </a:p>
@@ -2610,7 +2618,7 @@
           <a:p>
             <a:fld id="{BF72FBC3-9AC7-554F-B508-118BD7145C7B}" type="datetimeFigureOut">
               <a:rPr lang="en-US" smtClean="0"/>
-              <a:t>7/22/26</a:t>
+              <a:t>7/23/26</a:t>
             </a:fld>
             <a:endParaRPr lang="en-US"/>
           </a:p>
@@ -2921,7 +2929,7 @@
           <a:p>
             <a:fld id="{BF72FBC3-9AC7-554F-B508-118BD7145C7B}" type="datetimeFigureOut">
               <a:rPr lang="en-US" smtClean="0"/>
-              <a:t>7/22/26</a:t>
+              <a:t>7/23/26</a:t>
             </a:fld>
             <a:endParaRPr lang="en-US"/>
           </a:p>
@@ -3209,7 +3217,7 @@
           <a:p>
             <a:fld id="{BF72FBC3-9AC7-554F-B508-118BD7145C7B}" type="datetimeFigureOut">
               <a:rPr lang="en-US" smtClean="0"/>
-              <a:t>7/22/26</a:t>
+              <a:t>7/23/26</a:t>
             </a:fld>
             <a:endParaRPr lang="en-US"/>
           </a:p>
@@ -3450,7 +3458,7 @@
           <a:p>
             <a:fld id="{BF72FBC3-9AC7-554F-B508-118BD7145C7B}" type="datetimeFigureOut">
               <a:rPr lang="en-US" smtClean="0"/>
-              <a:t>7/22/26</a:t>
+              <a:t>7/23/26</a:t>
             </a:fld>
             <a:endParaRPr lang="en-US"/>
           </a:p>
@@ -4422,6 +4430,47 @@
           </a:prstGeom>
         </p:spPr>
       </p:pic>
+      <p:sp>
+        <p:nvSpPr>
+          <p:cNvPr id="3" name="TextBox 2">
+            <a:extLst>
+              <a:ext uri="{FF2B5EF4-FFF2-40B4-BE49-F238E27FC236}">
+                <a16:creationId xmlns:a16="http://schemas.microsoft.com/office/drawing/2014/main" id="{1D0F1AC3-249D-012D-134B-E2FB0EFAF5DC}"/>
+              </a:ext>
+            </a:extLst>
+          </p:cNvPr>
+          <p:cNvSpPr txBox="1"/>
+          <p:nvPr/>
+        </p:nvSpPr>
+        <p:spPr>
+          <a:xfrm>
+            <a:off x="265814" y="490501"/>
+            <a:ext cx="1913860" cy="923330"/>
+          </a:xfrm>
+          <a:prstGeom prst="rect">
+            <a:avLst/>
+          </a:prstGeom>
+          <a:noFill/>
+        </p:spPr>
+        <p:txBody>
+          <a:bodyPr wrap="square">
+            <a:spAutoFit/>
+          </a:bodyPr>
+          <a:lstStyle/>
+          <a:p>
+            <a:r>
+              <a:rPr lang="en-US" dirty="0">
+                <a:hlinkClick r:id="rId3"/>
+              </a:rPr>
+              <a:t>https://share.gemini.google/ktbD2LmdtH08</a:t>
+            </a:r>
+            <a:r>
+              <a:rPr lang="en-US" dirty="0"/>
+              <a:t> </a:t>
+            </a:r>
+          </a:p>
+        </p:txBody>
+      </p:sp>
     </p:spTree>
     <p:extLst>
       <p:ext uri="{BB962C8B-B14F-4D97-AF65-F5344CB8AC3E}">
